--- a/CorpApp_Presentation.pptx
+++ b/CorpApp_Presentation.pptx
@@ -4,19 +4,19 @@
   <p:sldMasterIdLst>
     <p:sldMasterId id="2147483648" r:id="rId1"/>
   </p:sldMasterIdLst>
+  <p:notesMasterIdLst>
+    <p:notesMasterId r:id="rId9"/>
+  </p:notesMasterIdLst>
   <p:sldIdLst>
     <p:sldId id="256" r:id="rId2"/>
     <p:sldId id="257" r:id="rId3"/>
     <p:sldId id="258" r:id="rId4"/>
     <p:sldId id="259" r:id="rId5"/>
     <p:sldId id="260" r:id="rId6"/>
-    <p:sldId id="261" r:id="rId7"/>
-    <p:sldId id="262" r:id="rId8"/>
+    <p:sldId id="262" r:id="rId7"/>
+    <p:sldId id="261" r:id="rId8"/>
   </p:sldIdLst>
-  <p:notesMasterIdLst>
-    <p:notesMasterId r:id="rId9"/>
-  </p:notesMasterIdLst>
-  <p:sldSz cx="9144000" cy="5143500"/>
+  <p:sldSz cx="9144000" cy="5143500" type="screen16x9"/>
   <p:notesSz cx="5143500" cy="9144000"/>
   <p:defaultTextStyle>
     <a:lvl1pPr marL="0" algn="l" defTabSz="914400" rtl="0" eaLnBrk="1" latinLnBrk="0" hangingPunct="1">
@@ -110,6 +110,11 @@
       </a:defRPr>
     </a:lvl9pPr>
   </p:defaultTextStyle>
+  <p:extLst>
+    <p:ext uri="{EFAFB233-063F-42B5-8137-9DF3F51BA10A}">
+      <p15:sldGuideLst xmlns:p15="http://schemas.microsoft.com/office/powerpoint/2012/main"/>
+    </p:ext>
+  </p:extLst>
 </p:presentation>
 </file>
 
@@ -135,234 +140,10 @@
           <a:chExt cx="0" cy="0"/>
         </a:xfrm>
       </p:grpSpPr>
-      <p:sp>
-        <p:nvSpPr>
-          <p:cNvPr id="2" name="Header Placeholder 1"/>
-          <p:cNvSpPr>
-            <a:spLocks noGrp="1"/>
-          </p:cNvSpPr>
-          <p:nvPr>
-            <p:ph type="hdr" sz="quarter"/>
-          </p:nvPr>
-        </p:nvSpPr>
-        <p:spPr>
-          <a:xfrm>
-            <a:off x="0" y="0"/>
-            <a:ext cx="2971800" cy="458788"/>
-          </a:xfrm>
-          <a:prstGeom prst="rect">
-            <a:avLst/>
-          </a:prstGeom>
-        </p:spPr>
-        <p:txBody>
-          <a:bodyPr vert="horz" lIns="91440" tIns="45720" rIns="91440" bIns="45720" rtlCol="0"/>
-          <a:lstStyle>
-            <a:lvl1pPr algn="l">
-              <a:defRPr sz="1200"/>
-            </a:lvl1pPr>
-          </a:lstStyle>
-          <a:p>
-            <a:endParaRPr lang="en-US"/>
-          </a:p>
-        </p:txBody>
-      </p:sp>
-      <p:sp>
-        <p:nvSpPr>
-          <p:cNvPr id="3" name="Date Placeholder 2"/>
-          <p:cNvSpPr>
-            <a:spLocks noGrp="1"/>
-          </p:cNvSpPr>
-          <p:nvPr>
-            <p:ph type="dt" idx="1"/>
-          </p:nvPr>
-        </p:nvSpPr>
-        <p:spPr>
-          <a:xfrm>
-            <a:off x="3884613" y="0"/>
-            <a:ext cx="2971800" cy="458788"/>
-          </a:xfrm>
-          <a:prstGeom prst="rect">
-            <a:avLst/>
-          </a:prstGeom>
-        </p:spPr>
-        <p:txBody>
-          <a:bodyPr vert="horz" lIns="91440" tIns="45720" rIns="91440" bIns="45720" rtlCol="0"/>
-          <a:lstStyle>
-            <a:lvl1pPr algn="r">
-              <a:defRPr sz="1200"/>
-            </a:lvl1pPr>
-          </a:lstStyle>
-          <a:p>
-            <a:fld id="{5282F153-3F37-0F45-9E97-73ACFA13230C}" type="datetimeFigureOut">
-              <a:rPr lang="en-US"/>
-              <a:t>7/23/19</a:t>
-            </a:fld>
-            <a:endParaRPr lang="en-US"/>
-          </a:p>
-        </p:txBody>
-      </p:sp>
-      <p:sp>
-        <p:nvSpPr>
-          <p:cNvPr id="4" name="Slide Image Placeholder 3"/>
-          <p:cNvSpPr>
-            <a:spLocks noGrp="1" noRot="1" noChangeAspect="1"/>
-          </p:cNvSpPr>
-          <p:nvPr>
-            <p:ph type="sldImg" idx="2"/>
-          </p:nvPr>
-        </p:nvSpPr>
-        <p:spPr>
-          <a:xfrm>
-            <a:off x="685800" y="1143000"/>
-            <a:ext cx="5486400" cy="3086100"/>
-          </a:xfrm>
-          <a:prstGeom prst="rect">
-            <a:avLst/>
-          </a:prstGeom>
-          <a:noFill/>
-          <a:ln w="12700">
-            <a:solidFill>
-              <a:prstClr val="black"/>
-            </a:solidFill>
-          </a:ln>
-        </p:spPr>
-        <p:txBody>
-          <a:bodyPr vert="horz" lIns="91440" tIns="45720" rIns="91440" bIns="45720" rtlCol="0" anchor="ctr"/>
-          <a:lstStyle/>
-          <a:p>
-            <a:endParaRPr lang="en-US"/>
-          </a:p>
-        </p:txBody>
-      </p:sp>
-      <p:sp>
-        <p:nvSpPr>
-          <p:cNvPr id="5" name="Notes Placeholder 4"/>
-          <p:cNvSpPr>
-            <a:spLocks noGrp="1"/>
-          </p:cNvSpPr>
-          <p:nvPr>
-            <p:ph type="body" sz="quarter" idx="3"/>
-          </p:nvPr>
-        </p:nvSpPr>
-        <p:spPr>
-          <a:xfrm>
-            <a:off x="685800" y="4400550"/>
-            <a:ext cx="5486400" cy="3600450"/>
-          </a:xfrm>
-          <a:prstGeom prst="rect">
-            <a:avLst/>
-          </a:prstGeom>
-        </p:spPr>
-        <p:txBody>
-          <a:bodyPr vert="horz" lIns="91440" tIns="45720" rIns="91440" bIns="45720" rtlCol="0"/>
-          <a:lstStyle/>
-          <a:p>
-            <a:pPr lvl="0"/>
-            <a:r>
-              <a:rPr lang="en-US"/>
-              <a:t>Click to edit Master text styles</a:t>
-            </a:r>
-          </a:p>
-          <a:p>
-            <a:pPr lvl="1"/>
-            <a:r>
-              <a:rPr lang="en-US"/>
-              <a:t>Second level</a:t>
-            </a:r>
-          </a:p>
-          <a:p>
-            <a:pPr lvl="2"/>
-            <a:r>
-              <a:rPr lang="en-US"/>
-              <a:t>Third level</a:t>
-            </a:r>
-          </a:p>
-          <a:p>
-            <a:pPr lvl="3"/>
-            <a:r>
-              <a:rPr lang="en-US"/>
-              <a:t>Fourth level</a:t>
-            </a:r>
-          </a:p>
-          <a:p>
-            <a:pPr lvl="4"/>
-            <a:r>
-              <a:rPr lang="en-US"/>
-              <a:t>Fifth level</a:t>
-            </a:r>
-          </a:p>
-        </p:txBody>
-      </p:sp>
-      <p:sp>
-        <p:nvSpPr>
-          <p:cNvPr id="6" name="Footer Placeholder 5"/>
-          <p:cNvSpPr>
-            <a:spLocks noGrp="1"/>
-          </p:cNvSpPr>
-          <p:nvPr>
-            <p:ph type="ftr" sz="quarter" idx="4"/>
-          </p:nvPr>
-        </p:nvSpPr>
-        <p:spPr>
-          <a:xfrm>
-            <a:off x="0" y="8685213"/>
-            <a:ext cx="2971800" cy="458787"/>
-          </a:xfrm>
-          <a:prstGeom prst="rect">
-            <a:avLst/>
-          </a:prstGeom>
-        </p:spPr>
-        <p:txBody>
-          <a:bodyPr vert="horz" lIns="91440" tIns="45720" rIns="91440" bIns="45720" rtlCol="0" anchor="b"/>
-          <a:lstStyle>
-            <a:lvl1pPr algn="l">
-              <a:defRPr sz="1200"/>
-            </a:lvl1pPr>
-          </a:lstStyle>
-          <a:p>
-            <a:endParaRPr lang="en-US"/>
-          </a:p>
-        </p:txBody>
-      </p:sp>
-      <p:sp>
-        <p:nvSpPr>
-          <p:cNvPr id="7" name="Slide Number Placeholder 6"/>
-          <p:cNvSpPr>
-            <a:spLocks noGrp="1"/>
-          </p:cNvSpPr>
-          <p:nvPr>
-            <p:ph type="sldNum" sz="quarter" idx="5"/>
-          </p:nvPr>
-        </p:nvSpPr>
-        <p:spPr>
-          <a:xfrm>
-            <a:off x="3884613" y="8685213"/>
-            <a:ext cx="2971800" cy="458787"/>
-          </a:xfrm>
-          <a:prstGeom prst="rect">
-            <a:avLst/>
-          </a:prstGeom>
-        </p:spPr>
-        <p:txBody>
-          <a:bodyPr vert="horz" lIns="91440" tIns="45720" rIns="91440" bIns="45720" rtlCol="0" anchor="b"/>
-          <a:lstStyle>
-            <a:lvl1pPr algn="r">
-              <a:defRPr sz="1200"/>
-            </a:lvl1pPr>
-          </a:lstStyle>
-          <a:p>
-            <a:fld id="{CE5E9CC1-C706-0F49-92D6-E571CC5EEA8F}" type="slidenum">
-              <a:rPr lang="en-US"/>
-              <a:t>‹#›</a:t>
-            </a:fld>
-            <a:endParaRPr lang="en-US"/>
-          </a:p>
-        </p:txBody>
-      </p:sp>
     </p:spTree>
     <p:extLst>
       <p:ext uri="{BB962C8B-B14F-4D97-AF65-F5344CB8AC3E}">
-        <p14:creationId xmlns:p14="http://schemas.microsoft.com/office/powerpoint/2010/main" val="1024086991"/>
+        <p14:creationId xmlns:p14="http://schemas.microsoft.com/office/powerpoint/2010/main" val="3155850542"/>
       </p:ext>
     </p:extLst>
   </p:cSld>
@@ -506,10 +287,6 @@
           <a:bodyPr/>
           <a:lstStyle/>
           <a:p>
-            <a:r>
-              <a:rPr lang="en-US" dirty="0"/>
-              <a:t/>
-            </a:r>
             <a:endParaRPr lang="en-US" dirty="0"/>
           </a:p>
         </p:txBody>
@@ -594,10 +371,6 @@
           <a:bodyPr/>
           <a:lstStyle/>
           <a:p>
-            <a:r>
-              <a:rPr lang="en-US" dirty="0"/>
-              <a:t/>
-            </a:r>
             <a:endParaRPr lang="en-US" dirty="0"/>
           </a:p>
         </p:txBody>
@@ -682,10 +455,6 @@
           <a:bodyPr/>
           <a:lstStyle/>
           <a:p>
-            <a:r>
-              <a:rPr lang="en-US" dirty="0"/>
-              <a:t/>
-            </a:r>
             <a:endParaRPr lang="en-US" dirty="0"/>
           </a:p>
         </p:txBody>
@@ -770,10 +539,6 @@
           <a:bodyPr/>
           <a:lstStyle/>
           <a:p>
-            <a:r>
-              <a:rPr lang="en-US" dirty="0"/>
-              <a:t/>
-            </a:r>
             <a:endParaRPr lang="en-US" dirty="0"/>
           </a:p>
         </p:txBody>
@@ -858,10 +623,6 @@
           <a:bodyPr/>
           <a:lstStyle/>
           <a:p>
-            <a:r>
-              <a:rPr lang="en-US" dirty="0"/>
-              <a:t/>
-            </a:r>
             <a:endParaRPr lang="en-US" dirty="0"/>
           </a:p>
         </p:txBody>
@@ -946,10 +707,6 @@
           <a:bodyPr/>
           <a:lstStyle/>
           <a:p>
-            <a:r>
-              <a:rPr lang="en-US" dirty="0"/>
-              <a:t/>
-            </a:r>
             <a:endParaRPr lang="en-US" dirty="0"/>
           </a:p>
         </p:txBody>
@@ -1034,10 +791,6 @@
           <a:bodyPr/>
           <a:lstStyle/>
           <a:p>
-            <a:r>
-              <a:rPr lang="en-US" dirty="0"/>
-              <a:t/>
-            </a:r>
             <a:endParaRPr lang="en-US" dirty="0"/>
           </a:p>
         </p:txBody>
@@ -1111,6 +864,11 @@
 <file path=ppt/slideMasters/slideMaster1.xml><?xml version="1.0" encoding="utf-8"?>
 <p:sldMaster xmlns:a="http://schemas.openxmlformats.org/drawingml/2006/main" xmlns:r="http://schemas.openxmlformats.org/officeDocument/2006/relationships" xmlns:p="http://schemas.openxmlformats.org/presentationml/2006/main">
   <p:cSld>
+    <p:bg>
+      <p:bgRef idx="1001">
+        <a:schemeClr val="bg1"/>
+      </p:bgRef>
+    </p:bg>
     <p:spTree>
       <p:nvGrpSpPr>
         <p:cNvPr id="1" name=""/>
@@ -1393,6 +1151,7 @@
         <a:solidFill>
           <a:srgbClr val="007C77"/>
         </a:solidFill>
+        <a:effectLst/>
       </p:bgPr>
     </p:bg>
     <p:spTree>
@@ -1430,7 +1189,7 @@
           <a:bodyPr wrap="square" rtlCol="0" anchor="ctr"/>
           <a:lstStyle/>
           <a:p>
-            <a:pPr algn="l" indent="0" marL="0">
+            <a:pPr marL="0" indent="0" algn="l">
               <a:buNone/>
             </a:pPr>
             <a:r>
@@ -1469,7 +1228,7 @@
           <a:bodyPr wrap="square" rtlCol="0" anchor="ctr"/>
           <a:lstStyle/>
           <a:p>
-            <a:pPr algn="l" indent="0" marL="0">
+            <a:pPr marL="0" indent="0" algn="l">
               <a:buNone/>
             </a:pPr>
             <a:r>
@@ -1486,7 +1245,7 @@
             <a:endParaRPr lang="en-US" sz="2200" dirty="0"/>
           </a:p>
           <a:p>
-            <a:pPr algn="l" indent="0" marL="0">
+            <a:pPr marL="0" indent="0" algn="l">
               <a:buNone/>
             </a:pPr>
             <a:r>
@@ -1525,7 +1284,7 @@
           <a:bodyPr wrap="square" rtlCol="0" anchor="ctr"/>
           <a:lstStyle/>
           <a:p>
-            <a:pPr algn="l" indent="0" marL="0">
+            <a:pPr marL="0" indent="0" algn="l">
               <a:buNone/>
             </a:pPr>
             <a:r>
@@ -1559,6 +1318,7 @@
         <a:solidFill>
           <a:srgbClr val="FFFFFF"/>
         </a:solidFill>
+        <a:effectLst/>
       </p:bgPr>
     </p:bg>
     <p:spTree>
@@ -1616,7 +1376,7 @@
           <a:bodyPr wrap="square" rtlCol="0" anchor="ctr"/>
           <a:lstStyle/>
           <a:p>
-            <a:pPr indent="0" marL="0">
+            <a:pPr marL="0" indent="0">
               <a:buNone/>
             </a:pPr>
             <a:r>
@@ -1655,7 +1415,7 @@
           <a:bodyPr wrap="square" rtlCol="0" anchor="ctr"/>
           <a:lstStyle/>
           <a:p>
-            <a:pPr indent="0" marL="0">
+            <a:pPr marL="0" indent="0">
               <a:buNone/>
             </a:pPr>
             <a:r>
@@ -1716,7 +1476,7 @@
           <a:bodyPr wrap="square" rtlCol="0" anchor="ctr"/>
           <a:lstStyle/>
           <a:p>
-            <a:pPr indent="0" marL="0">
+            <a:pPr marL="0" indent="0">
               <a:buNone/>
             </a:pPr>
             <a:r>
@@ -1755,7 +1515,7 @@
           <a:bodyPr wrap="square" rtlCol="0" anchor="ctr"/>
           <a:lstStyle/>
           <a:p>
-            <a:pPr indent="0" marL="0">
+            <a:pPr marL="0" indent="0">
               <a:buNone/>
             </a:pPr>
             <a:r>
@@ -1816,7 +1576,7 @@
           <a:bodyPr wrap="square" rtlCol="0" anchor="ctr"/>
           <a:lstStyle/>
           <a:p>
-            <a:pPr indent="0" marL="0">
+            <a:pPr marL="0" indent="0">
               <a:buNone/>
             </a:pPr>
             <a:r>
@@ -1855,7 +1615,7 @@
           <a:bodyPr wrap="square" rtlCol="0" anchor="ctr"/>
           <a:lstStyle/>
           <a:p>
-            <a:pPr indent="0" marL="0">
+            <a:pPr marL="0" indent="0">
               <a:buNone/>
             </a:pPr>
             <a:r>
@@ -1916,7 +1676,7 @@
           <a:bodyPr wrap="square" rtlCol="0" anchor="ctr"/>
           <a:lstStyle/>
           <a:p>
-            <a:pPr indent="0" marL="0">
+            <a:pPr marL="0" indent="0">
               <a:buNone/>
             </a:pPr>
             <a:r>
@@ -1955,7 +1715,7 @@
           <a:bodyPr wrap="square" rtlCol="0" anchor="ctr"/>
           <a:lstStyle/>
           <a:p>
-            <a:pPr indent="0" marL="0">
+            <a:pPr marL="0" indent="0">
               <a:buNone/>
             </a:pPr>
             <a:r>
@@ -2016,7 +1776,7 @@
           <a:bodyPr wrap="square" rtlCol="0" anchor="ctr"/>
           <a:lstStyle/>
           <a:p>
-            <a:pPr indent="0" marL="0">
+            <a:pPr marL="0" indent="0">
               <a:buNone/>
             </a:pPr>
             <a:r>
@@ -2055,7 +1815,7 @@
           <a:bodyPr wrap="square" rtlCol="0" anchor="ctr"/>
           <a:lstStyle/>
           <a:p>
-            <a:pPr indent="0" marL="0">
+            <a:pPr marL="0" indent="0">
               <a:buNone/>
             </a:pPr>
             <a:r>
@@ -2089,6 +1849,7 @@
         <a:solidFill>
           <a:srgbClr val="FFFFFF"/>
         </a:solidFill>
+        <a:effectLst/>
       </p:bgPr>
     </p:bg>
     <p:spTree>
@@ -2146,7 +1907,7 @@
           <a:bodyPr wrap="square" rtlCol="0" anchor="ctr"/>
           <a:lstStyle/>
           <a:p>
-            <a:pPr indent="0" marL="0">
+            <a:pPr marL="0" indent="0">
               <a:buNone/>
             </a:pPr>
             <a:r>
@@ -2207,7 +1968,7 @@
           <a:bodyPr wrap="square" rtlCol="0" anchor="ctr"/>
           <a:lstStyle/>
           <a:p>
-            <a:pPr indent="0" marL="0">
+            <a:pPr marL="0" indent="0">
               <a:buNone/>
             </a:pPr>
             <a:r>
@@ -2246,7 +2007,7 @@
           <a:bodyPr wrap="square" rtlCol="0" anchor="ctr"/>
           <a:lstStyle/>
           <a:p>
-            <a:pPr indent="0" marL="0">
+            <a:pPr marL="0" indent="0">
               <a:buNone/>
             </a:pPr>
             <a:r>
@@ -2307,7 +2068,7 @@
           <a:bodyPr wrap="square" rtlCol="0" anchor="ctr"/>
           <a:lstStyle/>
           <a:p>
-            <a:pPr indent="0" marL="0">
+            <a:pPr marL="0" indent="0">
               <a:buNone/>
             </a:pPr>
             <a:r>
@@ -2346,7 +2107,7 @@
           <a:bodyPr wrap="square" rtlCol="0" anchor="ctr"/>
           <a:lstStyle/>
           <a:p>
-            <a:pPr indent="0" marL="0">
+            <a:pPr marL="0" indent="0">
               <a:buNone/>
             </a:pPr>
             <a:r>
@@ -2407,7 +2168,7 @@
           <a:bodyPr wrap="square" rtlCol="0" anchor="ctr"/>
           <a:lstStyle/>
           <a:p>
-            <a:pPr indent="0" marL="0">
+            <a:pPr marL="0" indent="0">
               <a:buNone/>
             </a:pPr>
             <a:r>
@@ -2446,7 +2207,7 @@
           <a:bodyPr wrap="square" rtlCol="0" anchor="ctr"/>
           <a:lstStyle/>
           <a:p>
-            <a:pPr indent="0" marL="0">
+            <a:pPr marL="0" indent="0">
               <a:buNone/>
             </a:pPr>
             <a:r>
@@ -2507,7 +2268,7 @@
           <a:bodyPr wrap="square" rtlCol="0" anchor="ctr"/>
           <a:lstStyle/>
           <a:p>
-            <a:pPr indent="0" marL="0">
+            <a:pPr marL="0" indent="0">
               <a:buNone/>
             </a:pPr>
             <a:r>
@@ -2546,7 +2307,7 @@
           <a:bodyPr wrap="square" rtlCol="0" anchor="ctr"/>
           <a:lstStyle/>
           <a:p>
-            <a:pPr indent="0" marL="0">
+            <a:pPr marL="0" indent="0">
               <a:buNone/>
             </a:pPr>
             <a:r>
@@ -2607,7 +2368,7 @@
           <a:bodyPr wrap="square" rtlCol="0" anchor="ctr"/>
           <a:lstStyle/>
           <a:p>
-            <a:pPr indent="0" marL="0">
+            <a:pPr marL="0" indent="0">
               <a:buNone/>
             </a:pPr>
             <a:r>
@@ -2646,7 +2407,7 @@
           <a:bodyPr wrap="square" rtlCol="0" anchor="ctr"/>
           <a:lstStyle/>
           <a:p>
-            <a:pPr indent="0" marL="0">
+            <a:pPr marL="0" indent="0">
               <a:buNone/>
             </a:pPr>
             <a:r>
@@ -2707,7 +2468,7 @@
           <a:bodyPr wrap="square" rtlCol="0" anchor="ctr"/>
           <a:lstStyle/>
           <a:p>
-            <a:pPr indent="0" marL="0">
+            <a:pPr marL="0" indent="0">
               <a:buNone/>
             </a:pPr>
             <a:r>
@@ -2746,7 +2507,7 @@
           <a:bodyPr wrap="square" rtlCol="0" anchor="ctr"/>
           <a:lstStyle/>
           <a:p>
-            <a:pPr indent="0" marL="0">
+            <a:pPr marL="0" indent="0">
               <a:buNone/>
             </a:pPr>
             <a:r>
@@ -2780,6 +2541,7 @@
         <a:solidFill>
           <a:srgbClr val="FFFFFF"/>
         </a:solidFill>
+        <a:effectLst/>
       </p:bgPr>
     </p:bg>
     <p:spTree>
@@ -2837,7 +2599,7 @@
           <a:bodyPr wrap="square" rtlCol="0" anchor="ctr"/>
           <a:lstStyle/>
           <a:p>
-            <a:pPr indent="0" marL="0">
+            <a:pPr marL="0" indent="0">
               <a:buNone/>
             </a:pPr>
             <a:r>
@@ -2876,7 +2638,7 @@
           <a:bodyPr wrap="square" rtlCol="0" anchor="ctr"/>
           <a:lstStyle/>
           <a:p>
-            <a:pPr indent="0" marL="0">
+            <a:pPr marL="0" indent="0">
               <a:buNone/>
             </a:pPr>
             <a:r>
@@ -2915,7 +2677,7 @@
           <a:bodyPr wrap="square" rtlCol="0" anchor="ctr"/>
           <a:lstStyle/>
           <a:p>
-            <a:pPr indent="0" marL="0">
+            <a:pPr marL="0" indent="0">
               <a:buNone/>
             </a:pPr>
             <a:r>
@@ -2954,7 +2716,7 @@
           <a:bodyPr wrap="square" rtlCol="0" anchor="ctr"/>
           <a:lstStyle/>
           <a:p>
-            <a:pPr indent="0" marL="0">
+            <a:pPr marL="0" indent="0">
               <a:buNone/>
             </a:pPr>
             <a:r>
@@ -2993,7 +2755,7 @@
           <a:bodyPr wrap="square" rtlCol="0" anchor="ctr"/>
           <a:lstStyle/>
           <a:p>
-            <a:pPr indent="0" marL="0">
+            <a:pPr marL="0" indent="0">
               <a:buNone/>
             </a:pPr>
             <a:r>
@@ -3032,7 +2794,7 @@
           <a:bodyPr wrap="square" rtlCol="0" anchor="ctr"/>
           <a:lstStyle/>
           <a:p>
-            <a:pPr indent="0" marL="0">
+            <a:pPr marL="0" indent="0">
               <a:buNone/>
             </a:pPr>
             <a:r>
@@ -3071,7 +2833,7 @@
           <a:bodyPr wrap="square" rtlCol="0" anchor="ctr"/>
           <a:lstStyle/>
           <a:p>
-            <a:pPr indent="0" marL="0">
+            <a:pPr marL="0" indent="0">
               <a:buNone/>
             </a:pPr>
             <a:r>
@@ -3110,7 +2872,7 @@
           <a:bodyPr wrap="square" rtlCol="0" anchor="ctr"/>
           <a:lstStyle/>
           <a:p>
-            <a:pPr indent="0" marL="0">
+            <a:pPr marL="0" indent="0">
               <a:buNone/>
             </a:pPr>
             <a:r>
@@ -3149,7 +2911,7 @@
           <a:bodyPr wrap="square" rtlCol="0" anchor="ctr"/>
           <a:lstStyle/>
           <a:p>
-            <a:pPr indent="0" marL="0">
+            <a:pPr marL="0" indent="0">
               <a:buNone/>
             </a:pPr>
             <a:r>
@@ -3188,7 +2950,7 @@
           <a:bodyPr wrap="square" rtlCol="0" anchor="ctr"/>
           <a:lstStyle/>
           <a:p>
-            <a:pPr indent="0" marL="0">
+            <a:pPr marL="0" indent="0">
               <a:buNone/>
             </a:pPr>
             <a:r>
@@ -3227,7 +2989,7 @@
           <a:bodyPr wrap="square" rtlCol="0" anchor="ctr"/>
           <a:lstStyle/>
           <a:p>
-            <a:pPr indent="0" marL="0">
+            <a:pPr marL="0" indent="0">
               <a:buNone/>
             </a:pPr>
             <a:r>
@@ -3266,7 +3028,7 @@
           <a:bodyPr wrap="square" rtlCol="0" anchor="ctr"/>
           <a:lstStyle/>
           <a:p>
-            <a:pPr indent="0" marL="0">
+            <a:pPr marL="0" indent="0">
               <a:buNone/>
             </a:pPr>
             <a:r>
@@ -3305,7 +3067,7 @@
           <a:bodyPr wrap="square" rtlCol="0" anchor="ctr"/>
           <a:lstStyle/>
           <a:p>
-            <a:pPr indent="0" marL="0">
+            <a:pPr marL="0" indent="0">
               <a:buNone/>
             </a:pPr>
             <a:r>
@@ -3339,6 +3101,7 @@
         <a:solidFill>
           <a:srgbClr val="FFFFFF"/>
         </a:solidFill>
+        <a:effectLst/>
       </p:bgPr>
     </p:bg>
     <p:spTree>
@@ -3396,11 +3159,11 @@
           <a:bodyPr wrap="square" rtlCol="0" anchor="ctr"/>
           <a:lstStyle/>
           <a:p>
-            <a:pPr indent="0" marL="0">
-              <a:buNone/>
-            </a:pPr>
-            <a:r>
-              <a:rPr lang="en-US" sz="2800" b="1" dirty="0">
+            <a:pPr marL="0" indent="0">
+              <a:buNone/>
+            </a:pPr>
+            <a:r>
+              <a:rPr lang="ru-RU" sz="2800" b="1" dirty="0">
                 <a:solidFill>
                   <a:srgbClr val="1A1A1A"/>
                 </a:solidFill>
@@ -3408,7 +3171,18 @@
                 <a:ea typeface="Arial" pitchFamily="34" charset="-122"/>
                 <a:cs typeface="Arial" pitchFamily="34" charset="-120"/>
               </a:rPr>
-              <a:t>Что ещё реализовано</a:t>
+              <a:t>Р</a:t>
+            </a:r>
+            <a:r>
+              <a:rPr lang="en-US" sz="2800" b="1" dirty="0" err="1">
+                <a:solidFill>
+                  <a:srgbClr val="1A1A1A"/>
+                </a:solidFill>
+                <a:latin typeface="Arial" pitchFamily="34" charset="0"/>
+                <a:ea typeface="Arial" pitchFamily="34" charset="-122"/>
+                <a:cs typeface="Arial" pitchFamily="34" charset="-120"/>
+              </a:rPr>
+              <a:t>еализовано</a:t>
             </a:r>
             <a:endParaRPr lang="en-US" sz="2800" dirty="0"/>
           </a:p>
@@ -3455,7 +3229,7 @@
           <a:bodyPr wrap="square" rtlCol="0" anchor="ctr"/>
           <a:lstStyle/>
           <a:p>
-            <a:pPr indent="0" marL="0">
+            <a:pPr marL="0" indent="0">
               <a:buNone/>
             </a:pPr>
             <a:r>
@@ -3514,9 +3288,31 @@
           <a:bodyPr wrap="square" rtlCol="0" anchor="ctr"/>
           <a:lstStyle/>
           <a:p>
-            <a:pPr indent="0" marL="0">
-              <a:buNone/>
-            </a:pPr>
+            <a:pPr marL="0" indent="0">
+              <a:buNone/>
+            </a:pPr>
+            <a:r>
+              <a:rPr lang="ru-RU" sz="1500" dirty="0">
+                <a:solidFill>
+                  <a:srgbClr val="1A1A1A"/>
+                </a:solidFill>
+                <a:latin typeface="Arial" pitchFamily="34" charset="0"/>
+                <a:ea typeface="Arial" pitchFamily="34" charset="-122"/>
+                <a:cs typeface="Arial" pitchFamily="34" charset="-120"/>
+              </a:rPr>
+              <a:t>Авторизация + </a:t>
+            </a:r>
+            <a:r>
+              <a:rPr lang="en-US" sz="1500" dirty="0" err="1">
+                <a:solidFill>
+                  <a:srgbClr val="1A1A1A"/>
+                </a:solidFill>
+                <a:latin typeface="Arial" pitchFamily="34" charset="0"/>
+                <a:ea typeface="Arial" pitchFamily="34" charset="-122"/>
+                <a:cs typeface="Arial" pitchFamily="34" charset="-120"/>
+              </a:rPr>
+              <a:t>Реавторизация</a:t>
+            </a:r>
             <a:r>
               <a:rPr lang="en-US" sz="1500" dirty="0">
                 <a:solidFill>
@@ -3526,7 +3322,29 @@
                 <a:ea typeface="Arial" pitchFamily="34" charset="-122"/>
                 <a:cs typeface="Arial" pitchFamily="34" charset="-120"/>
               </a:rPr>
-              <a:t>Реавторизация через Keychain</a:t>
+              <a:t> </a:t>
+            </a:r>
+            <a:r>
+              <a:rPr lang="ru-RU" sz="1500" dirty="0">
+                <a:solidFill>
+                  <a:srgbClr val="1A1A1A"/>
+                </a:solidFill>
+                <a:latin typeface="Arial" pitchFamily="34" charset="0"/>
+                <a:ea typeface="Arial" pitchFamily="34" charset="-122"/>
+                <a:cs typeface="Arial" pitchFamily="34" charset="-120"/>
+              </a:rPr>
+              <a:t>с использованием</a:t>
+            </a:r>
+            <a:r>
+              <a:rPr lang="en-US" sz="1500" dirty="0">
+                <a:solidFill>
+                  <a:srgbClr val="1A1A1A"/>
+                </a:solidFill>
+                <a:latin typeface="Arial" pitchFamily="34" charset="0"/>
+                <a:ea typeface="Arial" pitchFamily="34" charset="-122"/>
+                <a:cs typeface="Arial" pitchFamily="34" charset="-120"/>
+              </a:rPr>
+              <a:t> Keychain</a:t>
             </a:r>
             <a:endParaRPr lang="en-US" sz="1500" dirty="0"/>
           </a:p>
@@ -3573,7 +3391,7 @@
           <a:bodyPr wrap="square" rtlCol="0" anchor="ctr"/>
           <a:lstStyle/>
           <a:p>
-            <a:pPr indent="0" marL="0">
+            <a:pPr marL="0" indent="0">
               <a:buNone/>
             </a:pPr>
             <a:r>
@@ -3632,7 +3450,7 @@
           <a:bodyPr wrap="square" rtlCol="0" anchor="ctr"/>
           <a:lstStyle/>
           <a:p>
-            <a:pPr indent="0" marL="0">
+            <a:pPr marL="0" indent="0">
               <a:buNone/>
             </a:pPr>
             <a:r>
@@ -3691,9 +3509,20 @@
           <a:bodyPr wrap="square" rtlCol="0" anchor="ctr"/>
           <a:lstStyle/>
           <a:p>
-            <a:pPr indent="0" marL="0">
-              <a:buNone/>
-            </a:pPr>
+            <a:pPr marL="0" indent="0">
+              <a:buNone/>
+            </a:pPr>
+            <a:r>
+              <a:rPr lang="en-US" sz="1500" dirty="0" err="1">
+                <a:solidFill>
+                  <a:srgbClr val="1A1A1A"/>
+                </a:solidFill>
+                <a:latin typeface="Arial" pitchFamily="34" charset="0"/>
+                <a:ea typeface="Arial" pitchFamily="34" charset="-122"/>
+                <a:cs typeface="Arial" pitchFamily="34" charset="-120"/>
+              </a:rPr>
+              <a:t>Бейджи</a:t>
+            </a:r>
             <a:r>
               <a:rPr lang="en-US" sz="1500" dirty="0">
                 <a:solidFill>
@@ -3703,7 +3532,40 @@
                 <a:ea typeface="Arial" pitchFamily="34" charset="-122"/>
                 <a:cs typeface="Arial" pitchFamily="34" charset="-120"/>
               </a:rPr>
-              <a:t>Поиск по сотрудникам</a:t>
+              <a:t> </a:t>
+            </a:r>
+            <a:r>
+              <a:rPr lang="en-US" sz="1500" dirty="0" err="1">
+                <a:solidFill>
+                  <a:srgbClr val="1A1A1A"/>
+                </a:solidFill>
+                <a:latin typeface="Arial" pitchFamily="34" charset="0"/>
+                <a:ea typeface="Arial" pitchFamily="34" charset="-122"/>
+                <a:cs typeface="Arial" pitchFamily="34" charset="-120"/>
+              </a:rPr>
+              <a:t>незаполненных</a:t>
+            </a:r>
+            <a:r>
+              <a:rPr lang="en-US" sz="1500" dirty="0">
+                <a:solidFill>
+                  <a:srgbClr val="1A1A1A"/>
+                </a:solidFill>
+                <a:latin typeface="Arial" pitchFamily="34" charset="0"/>
+                <a:ea typeface="Arial" pitchFamily="34" charset="-122"/>
+                <a:cs typeface="Arial" pitchFamily="34" charset="-120"/>
+              </a:rPr>
+              <a:t> </a:t>
+            </a:r>
+            <a:r>
+              <a:rPr lang="en-US" sz="1500" dirty="0" err="1">
+                <a:solidFill>
+                  <a:srgbClr val="1A1A1A"/>
+                </a:solidFill>
+                <a:latin typeface="Arial" pitchFamily="34" charset="0"/>
+                <a:ea typeface="Arial" pitchFamily="34" charset="-122"/>
+                <a:cs typeface="Arial" pitchFamily="34" charset="-120"/>
+              </a:rPr>
+              <a:t>дней</a:t>
             </a:r>
             <a:endParaRPr lang="en-US" sz="1500" dirty="0"/>
           </a:p>
@@ -3750,9 +3612,20 @@
           <a:bodyPr wrap="square" rtlCol="0" anchor="ctr"/>
           <a:lstStyle/>
           <a:p>
-            <a:pPr indent="0" marL="0">
-              <a:buNone/>
-            </a:pPr>
+            <a:pPr marL="0" indent="0">
+              <a:buNone/>
+            </a:pPr>
+            <a:r>
+              <a:rPr lang="en-US" sz="1500" dirty="0" err="1">
+                <a:solidFill>
+                  <a:srgbClr val="1A1A1A"/>
+                </a:solidFill>
+                <a:latin typeface="Arial" pitchFamily="34" charset="0"/>
+                <a:ea typeface="Arial" pitchFamily="34" charset="-122"/>
+                <a:cs typeface="Arial" pitchFamily="34" charset="-120"/>
+              </a:rPr>
+              <a:t>Иерархия</a:t>
+            </a:r>
             <a:r>
               <a:rPr lang="en-US" sz="1500" dirty="0">
                 <a:solidFill>
@@ -3762,7 +3635,62 @@
                 <a:ea typeface="Arial" pitchFamily="34" charset="-122"/>
                 <a:cs typeface="Arial" pitchFamily="34" charset="-120"/>
               </a:rPr>
-              <a:t>Переключение темы (системная / светлая / тёмная)</a:t>
+              <a:t> </a:t>
+            </a:r>
+            <a:r>
+              <a:rPr lang="en-US" sz="1500" dirty="0" err="1">
+                <a:solidFill>
+                  <a:srgbClr val="1A1A1A"/>
+                </a:solidFill>
+                <a:latin typeface="Arial" pitchFamily="34" charset="0"/>
+                <a:ea typeface="Arial" pitchFamily="34" charset="-122"/>
+                <a:cs typeface="Arial" pitchFamily="34" charset="-120"/>
+              </a:rPr>
+              <a:t>команд</a:t>
+            </a:r>
+            <a:r>
+              <a:rPr lang="en-US" sz="1500" dirty="0">
+                <a:solidFill>
+                  <a:srgbClr val="1A1A1A"/>
+                </a:solidFill>
+                <a:latin typeface="Arial" pitchFamily="34" charset="0"/>
+                <a:ea typeface="Arial" pitchFamily="34" charset="-122"/>
+                <a:cs typeface="Arial" pitchFamily="34" charset="-120"/>
+              </a:rPr>
+              <a:t> </a:t>
+            </a:r>
+            <a:r>
+              <a:rPr lang="en-US" sz="1500" dirty="0" err="1">
+                <a:solidFill>
+                  <a:srgbClr val="1A1A1A"/>
+                </a:solidFill>
+                <a:latin typeface="Arial" pitchFamily="34" charset="0"/>
+                <a:ea typeface="Arial" pitchFamily="34" charset="-122"/>
+                <a:cs typeface="Arial" pitchFamily="34" charset="-120"/>
+              </a:rPr>
+              <a:t>и</a:t>
+            </a:r>
+            <a:r>
+              <a:rPr lang="en-US" sz="1500" dirty="0">
+                <a:solidFill>
+                  <a:srgbClr val="1A1A1A"/>
+                </a:solidFill>
+                <a:latin typeface="Arial" pitchFamily="34" charset="0"/>
+                <a:ea typeface="Arial" pitchFamily="34" charset="-122"/>
+                <a:cs typeface="Arial" pitchFamily="34" charset="-120"/>
+              </a:rPr>
+              <a:t> </a:t>
+            </a:r>
+            <a:r>
+              <a:rPr lang="en-US" sz="1500" dirty="0" err="1">
+                <a:solidFill>
+                  <a:srgbClr val="1A1A1A"/>
+                </a:solidFill>
+                <a:latin typeface="Arial" pitchFamily="34" charset="0"/>
+                <a:ea typeface="Arial" pitchFamily="34" charset="-122"/>
+                <a:cs typeface="Arial" pitchFamily="34" charset="-120"/>
+              </a:rPr>
+              <a:t>сотрудников</a:t>
             </a:r>
             <a:endParaRPr lang="en-US" sz="1500" dirty="0"/>
           </a:p>
@@ -3809,11 +3737,8 @@
           <a:bodyPr wrap="square" rtlCol="0" anchor="ctr"/>
           <a:lstStyle/>
           <a:p>
-            <a:pPr indent="0" marL="0">
-              <a:buNone/>
-            </a:pPr>
-            <a:r>
-              <a:rPr lang="en-US" sz="1500" dirty="0">
+            <a:r>
+              <a:rPr lang="en-US" sz="1500" dirty="0" err="1">
                 <a:solidFill>
                   <a:srgbClr val="1A1A1A"/>
                 </a:solidFill>
@@ -3821,7 +3746,40 @@
                 <a:ea typeface="Arial" pitchFamily="34" charset="-122"/>
                 <a:cs typeface="Arial" pitchFamily="34" charset="-120"/>
               </a:rPr>
-              <a:t>Бейджи незаполненных дней</a:t>
+              <a:t>Поиск</a:t>
+            </a:r>
+            <a:r>
+              <a:rPr lang="ru-RU" sz="1500" dirty="0">
+                <a:solidFill>
+                  <a:srgbClr val="1A1A1A"/>
+                </a:solidFill>
+                <a:latin typeface="Arial" pitchFamily="34" charset="0"/>
+                <a:ea typeface="Arial" pitchFamily="34" charset="-122"/>
+                <a:cs typeface="Arial" pitchFamily="34" charset="-120"/>
+              </a:rPr>
+              <a:t> </a:t>
+            </a:r>
+            <a:r>
+              <a:rPr lang="en-US" sz="1500" dirty="0" err="1">
+                <a:solidFill>
+                  <a:srgbClr val="1A1A1A"/>
+                </a:solidFill>
+                <a:latin typeface="Arial" pitchFamily="34" charset="0"/>
+                <a:ea typeface="Arial" pitchFamily="34" charset="-122"/>
+                <a:cs typeface="Arial" pitchFamily="34" charset="-120"/>
+              </a:rPr>
+              <a:t>сотрудник</a:t>
+            </a:r>
+            <a:r>
+              <a:rPr lang="ru-RU" sz="1500" dirty="0" err="1">
+                <a:solidFill>
+                  <a:srgbClr val="1A1A1A"/>
+                </a:solidFill>
+                <a:latin typeface="Arial" pitchFamily="34" charset="0"/>
+                <a:ea typeface="Arial" pitchFamily="34" charset="-122"/>
+                <a:cs typeface="Arial" pitchFamily="34" charset="-120"/>
+              </a:rPr>
+              <a:t>ов</a:t>
             </a:r>
             <a:endParaRPr lang="en-US" sz="1500" dirty="0"/>
           </a:p>
@@ -3868,9 +3826,17 @@
           <a:bodyPr wrap="square" rtlCol="0" anchor="ctr"/>
           <a:lstStyle/>
           <a:p>
-            <a:pPr indent="0" marL="0">
-              <a:buNone/>
-            </a:pPr>
+            <a:r>
+              <a:rPr lang="en-US" sz="1500" dirty="0" err="1">
+                <a:solidFill>
+                  <a:srgbClr val="1A1A1A"/>
+                </a:solidFill>
+                <a:latin typeface="Arial" pitchFamily="34" charset="0"/>
+                <a:ea typeface="Arial" pitchFamily="34" charset="-122"/>
+                <a:cs typeface="Arial" pitchFamily="34" charset="-120"/>
+              </a:rPr>
+              <a:t>Переключение</a:t>
+            </a:r>
             <a:r>
               <a:rPr lang="en-US" sz="1500" dirty="0">
                 <a:solidFill>
@@ -3880,7 +3846,95 @@
                 <a:ea typeface="Arial" pitchFamily="34" charset="-122"/>
                 <a:cs typeface="Arial" pitchFamily="34" charset="-120"/>
               </a:rPr>
-              <a:t>Иерархия команд и сотрудников</a:t>
+              <a:t> </a:t>
+            </a:r>
+            <a:r>
+              <a:rPr lang="en-US" sz="1500" dirty="0" err="1">
+                <a:solidFill>
+                  <a:srgbClr val="1A1A1A"/>
+                </a:solidFill>
+                <a:latin typeface="Arial" pitchFamily="34" charset="0"/>
+                <a:ea typeface="Arial" pitchFamily="34" charset="-122"/>
+                <a:cs typeface="Arial" pitchFamily="34" charset="-120"/>
+              </a:rPr>
+              <a:t>темы</a:t>
+            </a:r>
+            <a:r>
+              <a:rPr lang="en-US" sz="1500" dirty="0">
+                <a:solidFill>
+                  <a:srgbClr val="1A1A1A"/>
+                </a:solidFill>
+                <a:latin typeface="Arial" pitchFamily="34" charset="0"/>
+                <a:ea typeface="Arial" pitchFamily="34" charset="-122"/>
+                <a:cs typeface="Arial" pitchFamily="34" charset="-120"/>
+              </a:rPr>
+              <a:t> (</a:t>
+            </a:r>
+            <a:r>
+              <a:rPr lang="en-US" sz="1500" dirty="0" err="1">
+                <a:solidFill>
+                  <a:srgbClr val="1A1A1A"/>
+                </a:solidFill>
+                <a:latin typeface="Arial" pitchFamily="34" charset="0"/>
+                <a:ea typeface="Arial" pitchFamily="34" charset="-122"/>
+                <a:cs typeface="Arial" pitchFamily="34" charset="-120"/>
+              </a:rPr>
+              <a:t>системная</a:t>
+            </a:r>
+            <a:r>
+              <a:rPr lang="en-US" sz="1500" dirty="0">
+                <a:solidFill>
+                  <a:srgbClr val="1A1A1A"/>
+                </a:solidFill>
+                <a:latin typeface="Arial" pitchFamily="34" charset="0"/>
+                <a:ea typeface="Arial" pitchFamily="34" charset="-122"/>
+                <a:cs typeface="Arial" pitchFamily="34" charset="-120"/>
+              </a:rPr>
+              <a:t> / </a:t>
+            </a:r>
+            <a:r>
+              <a:rPr lang="en-US" sz="1500" dirty="0" err="1">
+                <a:solidFill>
+                  <a:srgbClr val="1A1A1A"/>
+                </a:solidFill>
+                <a:latin typeface="Arial" pitchFamily="34" charset="0"/>
+                <a:ea typeface="Arial" pitchFamily="34" charset="-122"/>
+                <a:cs typeface="Arial" pitchFamily="34" charset="-120"/>
+              </a:rPr>
+              <a:t>светлая</a:t>
+            </a:r>
+            <a:r>
+              <a:rPr lang="en-US" sz="1500" dirty="0">
+                <a:solidFill>
+                  <a:srgbClr val="1A1A1A"/>
+                </a:solidFill>
+                <a:latin typeface="Arial" pitchFamily="34" charset="0"/>
+                <a:ea typeface="Arial" pitchFamily="34" charset="-122"/>
+                <a:cs typeface="Arial" pitchFamily="34" charset="-120"/>
+              </a:rPr>
+              <a:t> / </a:t>
+            </a:r>
+            <a:r>
+              <a:rPr lang="en-US" sz="1500" dirty="0" err="1">
+                <a:solidFill>
+                  <a:srgbClr val="1A1A1A"/>
+                </a:solidFill>
+                <a:latin typeface="Arial" pitchFamily="34" charset="0"/>
+                <a:ea typeface="Arial" pitchFamily="34" charset="-122"/>
+                <a:cs typeface="Arial" pitchFamily="34" charset="-120"/>
+              </a:rPr>
+              <a:t>тёмная</a:t>
+            </a:r>
+            <a:r>
+              <a:rPr lang="en-US" sz="1500" dirty="0">
+                <a:solidFill>
+                  <a:srgbClr val="1A1A1A"/>
+                </a:solidFill>
+                <a:latin typeface="Arial" pitchFamily="34" charset="0"/>
+                <a:ea typeface="Arial" pitchFamily="34" charset="-122"/>
+                <a:cs typeface="Arial" pitchFamily="34" charset="-120"/>
+              </a:rPr>
+              <a:t>)</a:t>
             </a:r>
             <a:endParaRPr lang="en-US" sz="1500" dirty="0"/>
           </a:p>
@@ -3896,12 +3950,13 @@
 
 <file path=ppt/slides/slide6.xml><?xml version="1.0" encoding="utf-8"?>
 <p:sld xmlns:a="http://schemas.openxmlformats.org/drawingml/2006/main" xmlns:r="http://schemas.openxmlformats.org/officeDocument/2006/relationships" xmlns:p="http://schemas.openxmlformats.org/presentationml/2006/main">
-  <p:cSld name="Slide 6">
+  <p:cSld name="Slide 7">
     <p:bg>
       <p:bgPr>
         <a:solidFill>
-          <a:srgbClr val="FFFFFF"/>
+          <a:srgbClr val="007C77"/>
         </a:solidFill>
+        <a:effectLst/>
       </p:bgPr>
     </p:bg>
     <p:spTree>
@@ -3920,23 +3975,42 @@
       </p:grpSpPr>
       <p:sp>
         <p:nvSpPr>
-          <p:cNvPr id="2" name="Shape 0"/>
-          <p:cNvSpPr/>
-          <p:nvPr/>
-        </p:nvSpPr>
-        <p:spPr>
-          <a:xfrm>
-            <a:off x="0" y="0"/>
-            <a:ext cx="109728" cy="5143500"/>
-          </a:xfrm>
-          <a:prstGeom prst="rect">
-            <a:avLst/>
-          </a:prstGeom>
-          <a:solidFill>
-            <a:srgbClr val="007C77"/>
-          </a:solidFill>
-          <a:ln/>
-        </p:spPr>
+          <p:cNvPr id="2" name="Text 0"/>
+          <p:cNvSpPr/>
+          <p:nvPr/>
+        </p:nvSpPr>
+        <p:spPr>
+          <a:xfrm>
+            <a:off x="457200" y="1828800"/>
+            <a:ext cx="8229600" cy="731520"/>
+          </a:xfrm>
+          <a:prstGeom prst="rect">
+            <a:avLst/>
+          </a:prstGeom>
+          <a:noFill/>
+          <a:ln/>
+        </p:spPr>
+        <p:txBody>
+          <a:bodyPr wrap="square" rtlCol="0" anchor="ctr"/>
+          <a:lstStyle/>
+          <a:p>
+            <a:pPr marL="0" indent="0" algn="ctr">
+              <a:buNone/>
+            </a:pPr>
+            <a:r>
+              <a:rPr lang="en-US" sz="4000" b="1" dirty="0">
+                <a:solidFill>
+                  <a:srgbClr val="FFFFFF"/>
+                </a:solidFill>
+                <a:latin typeface="Arial" pitchFamily="34" charset="0"/>
+                <a:ea typeface="Arial" pitchFamily="34" charset="-122"/>
+                <a:cs typeface="Arial" pitchFamily="34" charset="-120"/>
+              </a:rPr>
+              <a:t>Демонстрация</a:t>
+            </a:r>
+            <a:endParaRPr lang="en-US" sz="4000" dirty="0"/>
+          </a:p>
+        </p:txBody>
       </p:sp>
       <p:sp>
         <p:nvSpPr>
@@ -3946,434 +4020,34 @@
         </p:nvSpPr>
         <p:spPr>
           <a:xfrm>
-            <a:off x="457200" y="365760"/>
-            <a:ext cx="8229600" cy="548640"/>
-          </a:xfrm>
-          <a:prstGeom prst="rect">
-            <a:avLst/>
-          </a:prstGeom>
-          <a:noFill/>
-          <a:ln/>
-        </p:spPr>
-        <p:txBody>
-          <a:bodyPr wrap="square" rtlCol="0" anchor="ctr"/>
-          <a:lstStyle/>
-          <a:p>
-            <a:pPr indent="0" marL="0">
-              <a:buNone/>
-            </a:pPr>
-            <a:r>
-              <a:rPr lang="en-US" sz="2800" b="1" dirty="0">
-                <a:solidFill>
-                  <a:srgbClr val="1A1A1A"/>
-                </a:solidFill>
-                <a:latin typeface="Arial" pitchFamily="34" charset="0"/>
-                <a:ea typeface="Arial" pitchFamily="34" charset="-122"/>
-                <a:cs typeface="Arial" pitchFamily="34" charset="-120"/>
-              </a:rPr>
-              <a:t>Что можно развивать дальше</a:t>
-            </a:r>
-            <a:endParaRPr lang="en-US" sz="2800" dirty="0"/>
-          </a:p>
-        </p:txBody>
-      </p:sp>
-      <p:sp>
-        <p:nvSpPr>
-          <p:cNvPr id="4" name="Shape 2"/>
-          <p:cNvSpPr/>
-          <p:nvPr/>
-        </p:nvSpPr>
-        <p:spPr>
-          <a:xfrm>
-            <a:off x="457200" y="1188720"/>
-            <a:ext cx="8229600" cy="777240"/>
-          </a:xfrm>
-          <a:prstGeom prst="roundRect">
-            <a:avLst>
-              <a:gd name="adj" fmla="val 9412"/>
-            </a:avLst>
-          </a:prstGeom>
-          <a:solidFill>
-            <a:srgbClr val="F5F7F6"/>
-          </a:solidFill>
-          <a:ln/>
-        </p:spPr>
-      </p:sp>
-      <p:sp>
-        <p:nvSpPr>
-          <p:cNvPr id="5" name="Text 3"/>
-          <p:cNvSpPr/>
-          <p:nvPr/>
-        </p:nvSpPr>
-        <p:spPr>
-          <a:xfrm>
-            <a:off x="640080" y="1280160"/>
-            <a:ext cx="7863840" cy="274320"/>
-          </a:xfrm>
-          <a:prstGeom prst="rect">
-            <a:avLst/>
-          </a:prstGeom>
-          <a:noFill/>
-          <a:ln/>
-        </p:spPr>
-        <p:txBody>
-          <a:bodyPr wrap="square" rtlCol="0" anchor="ctr"/>
-          <a:lstStyle/>
-          <a:p>
-            <a:pPr indent="0" marL="0">
-              <a:buNone/>
-            </a:pPr>
-            <a:r>
-              <a:rPr lang="en-US" sz="1500" b="1" dirty="0">
-                <a:solidFill>
-                  <a:srgbClr val="007C77"/>
-                </a:solidFill>
-                <a:latin typeface="Arial" pitchFamily="34" charset="0"/>
-                <a:ea typeface="Arial" pitchFamily="34" charset="-122"/>
-                <a:cs typeface="Arial" pitchFamily="34" charset="-120"/>
-              </a:rPr>
-              <a:t>Реальный бэкенд</a:t>
-            </a:r>
-            <a:endParaRPr lang="en-US" sz="1500" dirty="0"/>
-          </a:p>
-        </p:txBody>
-      </p:sp>
-      <p:sp>
-        <p:nvSpPr>
-          <p:cNvPr id="6" name="Text 4"/>
-          <p:cNvSpPr/>
-          <p:nvPr/>
-        </p:nvSpPr>
-        <p:spPr>
-          <a:xfrm>
-            <a:off x="640080" y="1572768"/>
-            <a:ext cx="7863840" cy="292608"/>
-          </a:xfrm>
-          <a:prstGeom prst="rect">
-            <a:avLst/>
-          </a:prstGeom>
-          <a:noFill/>
-          <a:ln/>
-        </p:spPr>
-        <p:txBody>
-          <a:bodyPr wrap="square" rtlCol="0" anchor="ctr"/>
-          <a:lstStyle/>
-          <a:p>
-            <a:pPr indent="0" marL="0">
-              <a:buNone/>
-            </a:pPr>
-            <a:r>
-              <a:rPr lang="en-US" sz="1300" dirty="0">
-                <a:solidFill>
-                  <a:srgbClr val="555555"/>
-                </a:solidFill>
-                <a:latin typeface="Arial" pitchFamily="34" charset="0"/>
-                <a:ea typeface="Arial" pitchFamily="34" charset="-122"/>
-                <a:cs typeface="Arial" pitchFamily="34" charset="-120"/>
-              </a:rPr>
-              <a:t>Замена MockNetworkService на работу с API через Get</a:t>
-            </a:r>
-            <a:endParaRPr lang="en-US" sz="1300" dirty="0"/>
-          </a:p>
-        </p:txBody>
-      </p:sp>
-      <p:sp>
-        <p:nvSpPr>
-          <p:cNvPr id="7" name="Shape 5"/>
-          <p:cNvSpPr/>
-          <p:nvPr/>
-        </p:nvSpPr>
-        <p:spPr>
-          <a:xfrm>
-            <a:off x="457200" y="2057400"/>
-            <a:ext cx="8229600" cy="777240"/>
-          </a:xfrm>
-          <a:prstGeom prst="roundRect">
-            <a:avLst>
-              <a:gd name="adj" fmla="val 9412"/>
-            </a:avLst>
-          </a:prstGeom>
-          <a:solidFill>
-            <a:srgbClr val="F5F7F6"/>
-          </a:solidFill>
-          <a:ln/>
-        </p:spPr>
-      </p:sp>
-      <p:sp>
-        <p:nvSpPr>
-          <p:cNvPr id="8" name="Text 6"/>
-          <p:cNvSpPr/>
-          <p:nvPr/>
-        </p:nvSpPr>
-        <p:spPr>
-          <a:xfrm>
-            <a:off x="640080" y="2148840"/>
-            <a:ext cx="7863840" cy="274320"/>
-          </a:xfrm>
-          <a:prstGeom prst="rect">
-            <a:avLst/>
-          </a:prstGeom>
-          <a:noFill/>
-          <a:ln/>
-        </p:spPr>
-        <p:txBody>
-          <a:bodyPr wrap="square" rtlCol="0" anchor="ctr"/>
-          <a:lstStyle/>
-          <a:p>
-            <a:pPr indent="0" marL="0">
-              <a:buNone/>
-            </a:pPr>
-            <a:r>
-              <a:rPr lang="en-US" sz="1500" b="1" dirty="0">
-                <a:solidFill>
-                  <a:srgbClr val="007C77"/>
-                </a:solidFill>
-                <a:latin typeface="Arial" pitchFamily="34" charset="0"/>
-                <a:ea typeface="Arial" pitchFamily="34" charset="-122"/>
-                <a:cs typeface="Arial" pitchFamily="34" charset="-120"/>
-              </a:rPr>
-              <a:t>Серверные пуши</a:t>
-            </a:r>
-            <a:endParaRPr lang="en-US" sz="1500" dirty="0"/>
-          </a:p>
-        </p:txBody>
-      </p:sp>
-      <p:sp>
-        <p:nvSpPr>
-          <p:cNvPr id="9" name="Text 7"/>
-          <p:cNvSpPr/>
-          <p:nvPr/>
-        </p:nvSpPr>
-        <p:spPr>
-          <a:xfrm>
-            <a:off x="640080" y="2441448"/>
-            <a:ext cx="7863840" cy="292608"/>
-          </a:xfrm>
-          <a:prstGeom prst="rect">
-            <a:avLst/>
-          </a:prstGeom>
-          <a:noFill/>
-          <a:ln/>
-        </p:spPr>
-        <p:txBody>
-          <a:bodyPr wrap="square" rtlCol="0" anchor="ctr"/>
-          <a:lstStyle/>
-          <a:p>
-            <a:pPr indent="0" marL="0">
-              <a:buNone/>
-            </a:pPr>
-            <a:r>
-              <a:rPr lang="en-US" sz="1300" dirty="0">
-                <a:solidFill>
-                  <a:srgbClr val="555555"/>
-                </a:solidFill>
-                <a:latin typeface="Arial" pitchFamily="34" charset="0"/>
-                <a:ea typeface="Arial" pitchFamily="34" charset="-122"/>
-                <a:cs typeface="Arial" pitchFamily="34" charset="-120"/>
-              </a:rPr>
-              <a:t>Уведомления о новых постах и незаполненных ТРЗ</a:t>
-            </a:r>
-            <a:endParaRPr lang="en-US" sz="1300" dirty="0"/>
-          </a:p>
-        </p:txBody>
-      </p:sp>
-      <p:sp>
-        <p:nvSpPr>
-          <p:cNvPr id="10" name="Shape 8"/>
-          <p:cNvSpPr/>
-          <p:nvPr/>
-        </p:nvSpPr>
-        <p:spPr>
-          <a:xfrm>
-            <a:off x="457200" y="2926080"/>
-            <a:ext cx="8229600" cy="777240"/>
-          </a:xfrm>
-          <a:prstGeom prst="roundRect">
-            <a:avLst>
-              <a:gd name="adj" fmla="val 9412"/>
-            </a:avLst>
-          </a:prstGeom>
-          <a:solidFill>
-            <a:srgbClr val="F5F7F6"/>
-          </a:solidFill>
-          <a:ln/>
-        </p:spPr>
-      </p:sp>
-      <p:sp>
-        <p:nvSpPr>
-          <p:cNvPr id="11" name="Text 9"/>
-          <p:cNvSpPr/>
-          <p:nvPr/>
-        </p:nvSpPr>
-        <p:spPr>
-          <a:xfrm>
-            <a:off x="640080" y="3017520"/>
-            <a:ext cx="7863840" cy="274320"/>
-          </a:xfrm>
-          <a:prstGeom prst="rect">
-            <a:avLst/>
-          </a:prstGeom>
-          <a:noFill/>
-          <a:ln/>
-        </p:spPr>
-        <p:txBody>
-          <a:bodyPr wrap="square" rtlCol="0" anchor="ctr"/>
-          <a:lstStyle/>
-          <a:p>
-            <a:pPr indent="0" marL="0">
-              <a:buNone/>
-            </a:pPr>
-            <a:r>
-              <a:rPr lang="en-US" sz="1500" b="1" dirty="0">
-                <a:solidFill>
-                  <a:srgbClr val="007C77"/>
-                </a:solidFill>
-                <a:latin typeface="Arial" pitchFamily="34" charset="0"/>
-                <a:ea typeface="Arial" pitchFamily="34" charset="-122"/>
-                <a:cs typeface="Arial" pitchFamily="34" charset="-120"/>
-              </a:rPr>
-              <a:t>Офлайн-режим</a:t>
-            </a:r>
-            <a:endParaRPr lang="en-US" sz="1500" dirty="0"/>
-          </a:p>
-        </p:txBody>
-      </p:sp>
-      <p:sp>
-        <p:nvSpPr>
-          <p:cNvPr id="12" name="Text 10"/>
-          <p:cNvSpPr/>
-          <p:nvPr/>
-        </p:nvSpPr>
-        <p:spPr>
-          <a:xfrm>
-            <a:off x="640080" y="3310128"/>
-            <a:ext cx="7863840" cy="292608"/>
-          </a:xfrm>
-          <a:prstGeom prst="rect">
-            <a:avLst/>
-          </a:prstGeom>
-          <a:noFill/>
-          <a:ln/>
-        </p:spPr>
-        <p:txBody>
-          <a:bodyPr wrap="square" rtlCol="0" anchor="ctr"/>
-          <a:lstStyle/>
-          <a:p>
-            <a:pPr indent="0" marL="0">
-              <a:buNone/>
-            </a:pPr>
-            <a:r>
-              <a:rPr lang="en-US" sz="1300" dirty="0">
-                <a:solidFill>
-                  <a:srgbClr val="555555"/>
-                </a:solidFill>
-                <a:latin typeface="Arial" pitchFamily="34" charset="0"/>
-                <a:ea typeface="Arial" pitchFamily="34" charset="-122"/>
-                <a:cs typeface="Arial" pitchFamily="34" charset="-120"/>
-              </a:rPr>
-              <a:t>Кэширование данных и работа без сети</a:t>
-            </a:r>
-            <a:endParaRPr lang="en-US" sz="1300" dirty="0"/>
-          </a:p>
-        </p:txBody>
-      </p:sp>
-      <p:sp>
-        <p:nvSpPr>
-          <p:cNvPr id="13" name="Shape 11"/>
-          <p:cNvSpPr/>
-          <p:nvPr/>
-        </p:nvSpPr>
-        <p:spPr>
-          <a:xfrm>
-            <a:off x="457200" y="3794760"/>
-            <a:ext cx="8229600" cy="777240"/>
-          </a:xfrm>
-          <a:prstGeom prst="roundRect">
-            <a:avLst>
-              <a:gd name="adj" fmla="val 9412"/>
-            </a:avLst>
-          </a:prstGeom>
-          <a:solidFill>
-            <a:srgbClr val="F5F7F6"/>
-          </a:solidFill>
-          <a:ln/>
-        </p:spPr>
-      </p:sp>
-      <p:sp>
-        <p:nvSpPr>
-          <p:cNvPr id="14" name="Text 12"/>
-          <p:cNvSpPr/>
-          <p:nvPr/>
-        </p:nvSpPr>
-        <p:spPr>
-          <a:xfrm>
-            <a:off x="640080" y="3886200"/>
-            <a:ext cx="7863840" cy="274320"/>
-          </a:xfrm>
-          <a:prstGeom prst="rect">
-            <a:avLst/>
-          </a:prstGeom>
-          <a:noFill/>
-          <a:ln/>
-        </p:spPr>
-        <p:txBody>
-          <a:bodyPr wrap="square" rtlCol="0" anchor="ctr"/>
-          <a:lstStyle/>
-          <a:p>
-            <a:pPr indent="0" marL="0">
-              <a:buNone/>
-            </a:pPr>
-            <a:r>
-              <a:rPr lang="en-US" sz="1500" b="1" dirty="0">
-                <a:solidFill>
-                  <a:srgbClr val="007C77"/>
-                </a:solidFill>
-                <a:latin typeface="Arial" pitchFamily="34" charset="0"/>
-                <a:ea typeface="Arial" pitchFamily="34" charset="-122"/>
-                <a:cs typeface="Arial" pitchFamily="34" charset="-120"/>
-              </a:rPr>
-              <a:t>Расширение функционала</a:t>
-            </a:r>
-            <a:endParaRPr lang="en-US" sz="1500" dirty="0"/>
-          </a:p>
-        </p:txBody>
-      </p:sp>
-      <p:sp>
-        <p:nvSpPr>
-          <p:cNvPr id="15" name="Text 13"/>
-          <p:cNvSpPr/>
-          <p:nvPr/>
-        </p:nvSpPr>
-        <p:spPr>
-          <a:xfrm>
-            <a:off x="640080" y="4178808"/>
-            <a:ext cx="7863840" cy="292608"/>
-          </a:xfrm>
-          <a:prstGeom prst="rect">
-            <a:avLst/>
-          </a:prstGeom>
-          <a:noFill/>
-          <a:ln/>
-        </p:spPr>
-        <p:txBody>
-          <a:bodyPr wrap="square" rtlCol="0" anchor="ctr"/>
-          <a:lstStyle/>
-          <a:p>
-            <a:pPr indent="0" marL="0">
-              <a:buNone/>
-            </a:pPr>
-            <a:r>
-              <a:rPr lang="en-US" sz="1300" dirty="0">
-                <a:solidFill>
-                  <a:srgbClr val="555555"/>
-                </a:solidFill>
-                <a:latin typeface="Arial" pitchFamily="34" charset="0"/>
-                <a:ea typeface="Arial" pitchFamily="34" charset="-122"/>
-                <a:cs typeface="Arial" pitchFamily="34" charset="-120"/>
-              </a:rPr>
-              <a:t>Заявки, документы, чаты, календарь мероприятий</a:t>
-            </a:r>
-            <a:endParaRPr lang="en-US" sz="1300" dirty="0"/>
+            <a:off x="457200" y="2651760"/>
+            <a:ext cx="8229600" cy="457200"/>
+          </a:xfrm>
+          <a:prstGeom prst="rect">
+            <a:avLst/>
+          </a:prstGeom>
+          <a:noFill/>
+          <a:ln/>
+        </p:spPr>
+        <p:txBody>
+          <a:bodyPr wrap="square" rtlCol="0" anchor="ctr"/>
+          <a:lstStyle/>
+          <a:p>
+            <a:pPr marL="0" indent="0" algn="ctr">
+              <a:buNone/>
+            </a:pPr>
+            <a:r>
+              <a:rPr lang="en-US" sz="1800" dirty="0">
+                <a:solidFill>
+                  <a:srgbClr val="E0F2F1"/>
+                </a:solidFill>
+                <a:latin typeface="Arial" pitchFamily="34" charset="0"/>
+                <a:ea typeface="Arial" pitchFamily="34" charset="-122"/>
+                <a:cs typeface="Arial" pitchFamily="34" charset="-120"/>
+              </a:rPr>
+              <a:t>Переходим к живому показу приложения</a:t>
+            </a:r>
+            <a:endParaRPr lang="en-US" sz="1800" dirty="0"/>
           </a:p>
         </p:txBody>
       </p:sp>
@@ -4387,12 +4061,13 @@
 
 <file path=ppt/slides/slide7.xml><?xml version="1.0" encoding="utf-8"?>
 <p:sld xmlns:a="http://schemas.openxmlformats.org/drawingml/2006/main" xmlns:r="http://schemas.openxmlformats.org/officeDocument/2006/relationships" xmlns:p="http://schemas.openxmlformats.org/presentationml/2006/main">
-  <p:cSld name="Slide 7">
+  <p:cSld name="Slide 6">
     <p:bg>
       <p:bgPr>
         <a:solidFill>
-          <a:srgbClr val="007C77"/>
+          <a:srgbClr val="FFFFFF"/>
         </a:solidFill>
+        <a:effectLst/>
       </p:bgPr>
     </p:bg>
     <p:spTree>
@@ -4411,42 +4086,23 @@
       </p:grpSpPr>
       <p:sp>
         <p:nvSpPr>
-          <p:cNvPr id="2" name="Text 0"/>
-          <p:cNvSpPr/>
-          <p:nvPr/>
-        </p:nvSpPr>
-        <p:spPr>
-          <a:xfrm>
-            <a:off x="457200" y="1828800"/>
-            <a:ext cx="8229600" cy="731520"/>
-          </a:xfrm>
-          <a:prstGeom prst="rect">
-            <a:avLst/>
-          </a:prstGeom>
-          <a:noFill/>
-          <a:ln/>
-        </p:spPr>
-        <p:txBody>
-          <a:bodyPr wrap="square" rtlCol="0" anchor="ctr"/>
-          <a:lstStyle/>
-          <a:p>
-            <a:pPr algn="ctr" indent="0" marL="0">
-              <a:buNone/>
-            </a:pPr>
-            <a:r>
-              <a:rPr lang="en-US" sz="4000" b="1" dirty="0">
-                <a:solidFill>
-                  <a:srgbClr val="FFFFFF"/>
-                </a:solidFill>
-                <a:latin typeface="Arial" pitchFamily="34" charset="0"/>
-                <a:ea typeface="Arial" pitchFamily="34" charset="-122"/>
-                <a:cs typeface="Arial" pitchFamily="34" charset="-120"/>
-              </a:rPr>
-              <a:t>Демонстрация</a:t>
-            </a:r>
-            <a:endParaRPr lang="en-US" sz="4000" dirty="0"/>
-          </a:p>
-        </p:txBody>
+          <p:cNvPr id="2" name="Shape 0"/>
+          <p:cNvSpPr/>
+          <p:nvPr/>
+        </p:nvSpPr>
+        <p:spPr>
+          <a:xfrm>
+            <a:off x="0" y="0"/>
+            <a:ext cx="109728" cy="5143500"/>
+          </a:xfrm>
+          <a:prstGeom prst="rect">
+            <a:avLst/>
+          </a:prstGeom>
+          <a:solidFill>
+            <a:srgbClr val="007C77"/>
+          </a:solidFill>
+          <a:ln/>
+        </p:spPr>
       </p:sp>
       <p:sp>
         <p:nvSpPr>
@@ -4456,34 +4112,434 @@
         </p:nvSpPr>
         <p:spPr>
           <a:xfrm>
-            <a:off x="457200" y="2651760"/>
-            <a:ext cx="8229600" cy="457200"/>
-          </a:xfrm>
-          <a:prstGeom prst="rect">
-            <a:avLst/>
-          </a:prstGeom>
-          <a:noFill/>
-          <a:ln/>
-        </p:spPr>
-        <p:txBody>
-          <a:bodyPr wrap="square" rtlCol="0" anchor="ctr"/>
-          <a:lstStyle/>
-          <a:p>
-            <a:pPr algn="ctr" indent="0" marL="0">
-              <a:buNone/>
-            </a:pPr>
-            <a:r>
-              <a:rPr lang="en-US" sz="1800" dirty="0">
-                <a:solidFill>
-                  <a:srgbClr val="E0F2F1"/>
-                </a:solidFill>
-                <a:latin typeface="Arial" pitchFamily="34" charset="0"/>
-                <a:ea typeface="Arial" pitchFamily="34" charset="-122"/>
-                <a:cs typeface="Arial" pitchFamily="34" charset="-120"/>
-              </a:rPr>
-              <a:t>Переходим к живому показу приложения</a:t>
-            </a:r>
-            <a:endParaRPr lang="en-US" sz="1800" dirty="0"/>
+            <a:off x="457200" y="365760"/>
+            <a:ext cx="8229600" cy="548640"/>
+          </a:xfrm>
+          <a:prstGeom prst="rect">
+            <a:avLst/>
+          </a:prstGeom>
+          <a:noFill/>
+          <a:ln/>
+        </p:spPr>
+        <p:txBody>
+          <a:bodyPr wrap="square" rtlCol="0" anchor="ctr"/>
+          <a:lstStyle/>
+          <a:p>
+            <a:pPr marL="0" indent="0">
+              <a:buNone/>
+            </a:pPr>
+            <a:r>
+              <a:rPr lang="en-US" sz="2800" b="1" dirty="0">
+                <a:solidFill>
+                  <a:srgbClr val="1A1A1A"/>
+                </a:solidFill>
+                <a:latin typeface="Arial" pitchFamily="34" charset="0"/>
+                <a:ea typeface="Arial" pitchFamily="34" charset="-122"/>
+                <a:cs typeface="Arial" pitchFamily="34" charset="-120"/>
+              </a:rPr>
+              <a:t>Что можно развивать дальше</a:t>
+            </a:r>
+            <a:endParaRPr lang="en-US" sz="2800" dirty="0"/>
+          </a:p>
+        </p:txBody>
+      </p:sp>
+      <p:sp>
+        <p:nvSpPr>
+          <p:cNvPr id="4" name="Shape 2"/>
+          <p:cNvSpPr/>
+          <p:nvPr/>
+        </p:nvSpPr>
+        <p:spPr>
+          <a:xfrm>
+            <a:off x="457200" y="1188720"/>
+            <a:ext cx="8229600" cy="777240"/>
+          </a:xfrm>
+          <a:prstGeom prst="roundRect">
+            <a:avLst>
+              <a:gd name="adj" fmla="val 9412"/>
+            </a:avLst>
+          </a:prstGeom>
+          <a:solidFill>
+            <a:srgbClr val="F5F7F6"/>
+          </a:solidFill>
+          <a:ln/>
+        </p:spPr>
+      </p:sp>
+      <p:sp>
+        <p:nvSpPr>
+          <p:cNvPr id="5" name="Text 3"/>
+          <p:cNvSpPr/>
+          <p:nvPr/>
+        </p:nvSpPr>
+        <p:spPr>
+          <a:xfrm>
+            <a:off x="640080" y="1280160"/>
+            <a:ext cx="7863840" cy="274320"/>
+          </a:xfrm>
+          <a:prstGeom prst="rect">
+            <a:avLst/>
+          </a:prstGeom>
+          <a:noFill/>
+          <a:ln/>
+        </p:spPr>
+        <p:txBody>
+          <a:bodyPr wrap="square" rtlCol="0" anchor="ctr"/>
+          <a:lstStyle/>
+          <a:p>
+            <a:pPr marL="0" indent="0">
+              <a:buNone/>
+            </a:pPr>
+            <a:r>
+              <a:rPr lang="en-US" sz="1500" b="1" dirty="0">
+                <a:solidFill>
+                  <a:srgbClr val="007C77"/>
+                </a:solidFill>
+                <a:latin typeface="Arial" pitchFamily="34" charset="0"/>
+                <a:ea typeface="Arial" pitchFamily="34" charset="-122"/>
+                <a:cs typeface="Arial" pitchFamily="34" charset="-120"/>
+              </a:rPr>
+              <a:t>Реальный бэкенд</a:t>
+            </a:r>
+            <a:endParaRPr lang="en-US" sz="1500" dirty="0"/>
+          </a:p>
+        </p:txBody>
+      </p:sp>
+      <p:sp>
+        <p:nvSpPr>
+          <p:cNvPr id="6" name="Text 4"/>
+          <p:cNvSpPr/>
+          <p:nvPr/>
+        </p:nvSpPr>
+        <p:spPr>
+          <a:xfrm>
+            <a:off x="640080" y="1572768"/>
+            <a:ext cx="7863840" cy="292608"/>
+          </a:xfrm>
+          <a:prstGeom prst="rect">
+            <a:avLst/>
+          </a:prstGeom>
+          <a:noFill/>
+          <a:ln/>
+        </p:spPr>
+        <p:txBody>
+          <a:bodyPr wrap="square" rtlCol="0" anchor="ctr"/>
+          <a:lstStyle/>
+          <a:p>
+            <a:pPr marL="0" indent="0">
+              <a:buNone/>
+            </a:pPr>
+            <a:r>
+              <a:rPr lang="en-US" sz="1300" dirty="0">
+                <a:solidFill>
+                  <a:srgbClr val="555555"/>
+                </a:solidFill>
+                <a:latin typeface="Arial" pitchFamily="34" charset="0"/>
+                <a:ea typeface="Arial" pitchFamily="34" charset="-122"/>
+                <a:cs typeface="Arial" pitchFamily="34" charset="-120"/>
+              </a:rPr>
+              <a:t>Замена MockNetworkService на работу с API через Get</a:t>
+            </a:r>
+            <a:endParaRPr lang="en-US" sz="1300" dirty="0"/>
+          </a:p>
+        </p:txBody>
+      </p:sp>
+      <p:sp>
+        <p:nvSpPr>
+          <p:cNvPr id="7" name="Shape 5"/>
+          <p:cNvSpPr/>
+          <p:nvPr/>
+        </p:nvSpPr>
+        <p:spPr>
+          <a:xfrm>
+            <a:off x="457200" y="2057400"/>
+            <a:ext cx="8229600" cy="777240"/>
+          </a:xfrm>
+          <a:prstGeom prst="roundRect">
+            <a:avLst>
+              <a:gd name="adj" fmla="val 9412"/>
+            </a:avLst>
+          </a:prstGeom>
+          <a:solidFill>
+            <a:srgbClr val="F5F7F6"/>
+          </a:solidFill>
+          <a:ln/>
+        </p:spPr>
+      </p:sp>
+      <p:sp>
+        <p:nvSpPr>
+          <p:cNvPr id="8" name="Text 6"/>
+          <p:cNvSpPr/>
+          <p:nvPr/>
+        </p:nvSpPr>
+        <p:spPr>
+          <a:xfrm>
+            <a:off x="640080" y="2148840"/>
+            <a:ext cx="7863840" cy="274320"/>
+          </a:xfrm>
+          <a:prstGeom prst="rect">
+            <a:avLst/>
+          </a:prstGeom>
+          <a:noFill/>
+          <a:ln/>
+        </p:spPr>
+        <p:txBody>
+          <a:bodyPr wrap="square" rtlCol="0" anchor="ctr"/>
+          <a:lstStyle/>
+          <a:p>
+            <a:pPr marL="0" indent="0">
+              <a:buNone/>
+            </a:pPr>
+            <a:r>
+              <a:rPr lang="en-US" sz="1500" b="1" dirty="0">
+                <a:solidFill>
+                  <a:srgbClr val="007C77"/>
+                </a:solidFill>
+                <a:latin typeface="Arial" pitchFamily="34" charset="0"/>
+                <a:ea typeface="Arial" pitchFamily="34" charset="-122"/>
+                <a:cs typeface="Arial" pitchFamily="34" charset="-120"/>
+              </a:rPr>
+              <a:t>Серверные пуши</a:t>
+            </a:r>
+            <a:endParaRPr lang="en-US" sz="1500" dirty="0"/>
+          </a:p>
+        </p:txBody>
+      </p:sp>
+      <p:sp>
+        <p:nvSpPr>
+          <p:cNvPr id="9" name="Text 7"/>
+          <p:cNvSpPr/>
+          <p:nvPr/>
+        </p:nvSpPr>
+        <p:spPr>
+          <a:xfrm>
+            <a:off x="640080" y="2441448"/>
+            <a:ext cx="7863840" cy="292608"/>
+          </a:xfrm>
+          <a:prstGeom prst="rect">
+            <a:avLst/>
+          </a:prstGeom>
+          <a:noFill/>
+          <a:ln/>
+        </p:spPr>
+        <p:txBody>
+          <a:bodyPr wrap="square" rtlCol="0" anchor="ctr"/>
+          <a:lstStyle/>
+          <a:p>
+            <a:pPr marL="0" indent="0">
+              <a:buNone/>
+            </a:pPr>
+            <a:r>
+              <a:rPr lang="en-US" sz="1300" dirty="0">
+                <a:solidFill>
+                  <a:srgbClr val="555555"/>
+                </a:solidFill>
+                <a:latin typeface="Arial" pitchFamily="34" charset="0"/>
+                <a:ea typeface="Arial" pitchFamily="34" charset="-122"/>
+                <a:cs typeface="Arial" pitchFamily="34" charset="-120"/>
+              </a:rPr>
+              <a:t>Уведомления о новых постах и незаполненных ТРЗ</a:t>
+            </a:r>
+            <a:endParaRPr lang="en-US" sz="1300" dirty="0"/>
+          </a:p>
+        </p:txBody>
+      </p:sp>
+      <p:sp>
+        <p:nvSpPr>
+          <p:cNvPr id="10" name="Shape 8"/>
+          <p:cNvSpPr/>
+          <p:nvPr/>
+        </p:nvSpPr>
+        <p:spPr>
+          <a:xfrm>
+            <a:off x="457200" y="2926080"/>
+            <a:ext cx="8229600" cy="777240"/>
+          </a:xfrm>
+          <a:prstGeom prst="roundRect">
+            <a:avLst>
+              <a:gd name="adj" fmla="val 9412"/>
+            </a:avLst>
+          </a:prstGeom>
+          <a:solidFill>
+            <a:srgbClr val="F5F7F6"/>
+          </a:solidFill>
+          <a:ln/>
+        </p:spPr>
+      </p:sp>
+      <p:sp>
+        <p:nvSpPr>
+          <p:cNvPr id="11" name="Text 9"/>
+          <p:cNvSpPr/>
+          <p:nvPr/>
+        </p:nvSpPr>
+        <p:spPr>
+          <a:xfrm>
+            <a:off x="640080" y="3017520"/>
+            <a:ext cx="7863840" cy="274320"/>
+          </a:xfrm>
+          <a:prstGeom prst="rect">
+            <a:avLst/>
+          </a:prstGeom>
+          <a:noFill/>
+          <a:ln/>
+        </p:spPr>
+        <p:txBody>
+          <a:bodyPr wrap="square" rtlCol="0" anchor="ctr"/>
+          <a:lstStyle/>
+          <a:p>
+            <a:pPr marL="0" indent="0">
+              <a:buNone/>
+            </a:pPr>
+            <a:r>
+              <a:rPr lang="en-US" sz="1500" b="1" dirty="0">
+                <a:solidFill>
+                  <a:srgbClr val="007C77"/>
+                </a:solidFill>
+                <a:latin typeface="Arial" pitchFamily="34" charset="0"/>
+                <a:ea typeface="Arial" pitchFamily="34" charset="-122"/>
+                <a:cs typeface="Arial" pitchFamily="34" charset="-120"/>
+              </a:rPr>
+              <a:t>Офлайн-режим</a:t>
+            </a:r>
+            <a:endParaRPr lang="en-US" sz="1500" dirty="0"/>
+          </a:p>
+        </p:txBody>
+      </p:sp>
+      <p:sp>
+        <p:nvSpPr>
+          <p:cNvPr id="12" name="Text 10"/>
+          <p:cNvSpPr/>
+          <p:nvPr/>
+        </p:nvSpPr>
+        <p:spPr>
+          <a:xfrm>
+            <a:off x="640080" y="3310128"/>
+            <a:ext cx="7863840" cy="292608"/>
+          </a:xfrm>
+          <a:prstGeom prst="rect">
+            <a:avLst/>
+          </a:prstGeom>
+          <a:noFill/>
+          <a:ln/>
+        </p:spPr>
+        <p:txBody>
+          <a:bodyPr wrap="square" rtlCol="0" anchor="ctr"/>
+          <a:lstStyle/>
+          <a:p>
+            <a:pPr marL="0" indent="0">
+              <a:buNone/>
+            </a:pPr>
+            <a:r>
+              <a:rPr lang="en-US" sz="1300" dirty="0">
+                <a:solidFill>
+                  <a:srgbClr val="555555"/>
+                </a:solidFill>
+                <a:latin typeface="Arial" pitchFamily="34" charset="0"/>
+                <a:ea typeface="Arial" pitchFamily="34" charset="-122"/>
+                <a:cs typeface="Arial" pitchFamily="34" charset="-120"/>
+              </a:rPr>
+              <a:t>Кэширование данных и работа без сети</a:t>
+            </a:r>
+            <a:endParaRPr lang="en-US" sz="1300" dirty="0"/>
+          </a:p>
+        </p:txBody>
+      </p:sp>
+      <p:sp>
+        <p:nvSpPr>
+          <p:cNvPr id="13" name="Shape 11"/>
+          <p:cNvSpPr/>
+          <p:nvPr/>
+        </p:nvSpPr>
+        <p:spPr>
+          <a:xfrm>
+            <a:off x="457200" y="3794760"/>
+            <a:ext cx="8229600" cy="777240"/>
+          </a:xfrm>
+          <a:prstGeom prst="roundRect">
+            <a:avLst>
+              <a:gd name="adj" fmla="val 9412"/>
+            </a:avLst>
+          </a:prstGeom>
+          <a:solidFill>
+            <a:srgbClr val="F5F7F6"/>
+          </a:solidFill>
+          <a:ln/>
+        </p:spPr>
+      </p:sp>
+      <p:sp>
+        <p:nvSpPr>
+          <p:cNvPr id="14" name="Text 12"/>
+          <p:cNvSpPr/>
+          <p:nvPr/>
+        </p:nvSpPr>
+        <p:spPr>
+          <a:xfrm>
+            <a:off x="640080" y="3886200"/>
+            <a:ext cx="7863840" cy="274320"/>
+          </a:xfrm>
+          <a:prstGeom prst="rect">
+            <a:avLst/>
+          </a:prstGeom>
+          <a:noFill/>
+          <a:ln/>
+        </p:spPr>
+        <p:txBody>
+          <a:bodyPr wrap="square" rtlCol="0" anchor="ctr"/>
+          <a:lstStyle/>
+          <a:p>
+            <a:pPr marL="0" indent="0">
+              <a:buNone/>
+            </a:pPr>
+            <a:r>
+              <a:rPr lang="en-US" sz="1500" b="1" dirty="0">
+                <a:solidFill>
+                  <a:srgbClr val="007C77"/>
+                </a:solidFill>
+                <a:latin typeface="Arial" pitchFamily="34" charset="0"/>
+                <a:ea typeface="Arial" pitchFamily="34" charset="-122"/>
+                <a:cs typeface="Arial" pitchFamily="34" charset="-120"/>
+              </a:rPr>
+              <a:t>Расширение функционала</a:t>
+            </a:r>
+            <a:endParaRPr lang="en-US" sz="1500" dirty="0"/>
+          </a:p>
+        </p:txBody>
+      </p:sp>
+      <p:sp>
+        <p:nvSpPr>
+          <p:cNvPr id="15" name="Text 13"/>
+          <p:cNvSpPr/>
+          <p:nvPr/>
+        </p:nvSpPr>
+        <p:spPr>
+          <a:xfrm>
+            <a:off x="640080" y="4178808"/>
+            <a:ext cx="7863840" cy="292608"/>
+          </a:xfrm>
+          <a:prstGeom prst="rect">
+            <a:avLst/>
+          </a:prstGeom>
+          <a:noFill/>
+          <a:ln/>
+        </p:spPr>
+        <p:txBody>
+          <a:bodyPr wrap="square" rtlCol="0" anchor="ctr"/>
+          <a:lstStyle/>
+          <a:p>
+            <a:pPr marL="0" indent="0">
+              <a:buNone/>
+            </a:pPr>
+            <a:r>
+              <a:rPr lang="en-US" sz="1300" dirty="0">
+                <a:solidFill>
+                  <a:srgbClr val="555555"/>
+                </a:solidFill>
+                <a:latin typeface="Arial" pitchFamily="34" charset="0"/>
+                <a:ea typeface="Arial" pitchFamily="34" charset="-122"/>
+                <a:cs typeface="Arial" pitchFamily="34" charset="-120"/>
+              </a:rPr>
+              <a:t>Заявки, документы, чаты, календарь мероприятий</a:t>
+            </a:r>
+            <a:endParaRPr lang="en-US" sz="1300" dirty="0"/>
           </a:p>
         </p:txBody>
       </p:sp>
@@ -4788,4 +4844,299 @@
     </a:ext>
   </a:extLst>
 </a:theme>
+</file>
+
+<file path=ppt/theme/theme2.xml><?xml version="1.0" encoding="utf-8"?>
+<a:theme xmlns:a="http://schemas.openxmlformats.org/drawingml/2006/main" name="Тема Office">
+  <a:themeElements>
+    <a:clrScheme name="Стандартная">
+      <a:dk1>
+        <a:sysClr val="windowText" lastClr="000000"/>
+      </a:dk1>
+      <a:lt1>
+        <a:sysClr val="window" lastClr="FFFFFF"/>
+      </a:lt1>
+      <a:dk2>
+        <a:srgbClr val="44546A"/>
+      </a:dk2>
+      <a:lt2>
+        <a:srgbClr val="E7E6E6"/>
+      </a:lt2>
+      <a:accent1>
+        <a:srgbClr val="4472C4"/>
+      </a:accent1>
+      <a:accent2>
+        <a:srgbClr val="ED7D31"/>
+      </a:accent2>
+      <a:accent3>
+        <a:srgbClr val="A5A5A5"/>
+      </a:accent3>
+      <a:accent4>
+        <a:srgbClr val="FFC000"/>
+      </a:accent4>
+      <a:accent5>
+        <a:srgbClr val="5B9BD5"/>
+      </a:accent5>
+      <a:accent6>
+        <a:srgbClr val="70AD47"/>
+      </a:accent6>
+      <a:hlink>
+        <a:srgbClr val="0563C1"/>
+      </a:hlink>
+      <a:folHlink>
+        <a:srgbClr val="954F72"/>
+      </a:folHlink>
+    </a:clrScheme>
+    <a:fontScheme name="Стандартная">
+      <a:majorFont>
+        <a:latin typeface="Calibri Light" panose="020F0302020204030204"/>
+        <a:ea typeface=""/>
+        <a:cs typeface=""/>
+        <a:font script="Jpan" typeface="游ゴシック Light"/>
+        <a:font script="Hang" typeface="맑은 고딕"/>
+        <a:font script="Hans" typeface="等线 Light"/>
+        <a:font script="Hant" typeface="新細明體"/>
+        <a:font script="Arab" typeface="Times New Roman"/>
+        <a:font script="Hebr" typeface="Times New Roman"/>
+        <a:font script="Thai" typeface="Angsana New"/>
+        <a:font script="Ethi" typeface="Nyala"/>
+        <a:font script="Beng" typeface="Vrinda"/>
+        <a:font script="Gujr" typeface="Shruti"/>
+        <a:font script="Khmr" typeface="MoolBoran"/>
+        <a:font script="Knda" typeface="Tunga"/>
+        <a:font script="Guru" typeface="Raavi"/>
+        <a:font script="Cans" typeface="Euphemia"/>
+        <a:font script="Cher" typeface="Plantagenet Cherokee"/>
+        <a:font script="Yiii" typeface="Microsoft Yi Baiti"/>
+        <a:font script="Tibt" typeface="Microsoft Himalaya"/>
+        <a:font script="Thaa" typeface="MV Boli"/>
+        <a:font script="Deva" typeface="Mangal"/>
+        <a:font script="Telu" typeface="Gautami"/>
+        <a:font script="Taml" typeface="Latha"/>
+        <a:font script="Syrc" typeface="Estrangelo Edessa"/>
+        <a:font script="Orya" typeface="Kalinga"/>
+        <a:font script="Mlym" typeface="Kartika"/>
+        <a:font script="Laoo" typeface="DokChampa"/>
+        <a:font script="Sinh" typeface="Iskoola Pota"/>
+        <a:font script="Mong" typeface="Mongolian Baiti"/>
+        <a:font script="Viet" typeface="Times New Roman"/>
+        <a:font script="Uigh" typeface="Microsoft Uighur"/>
+        <a:font script="Geor" typeface="Sylfaen"/>
+        <a:font script="Armn" typeface="Arial"/>
+        <a:font script="Bugi" typeface="Leelawadee UI"/>
+        <a:font script="Bopo" typeface="Microsoft JhengHei"/>
+        <a:font script="Java" typeface="Javanese Text"/>
+        <a:font script="Lisu" typeface="Segoe UI"/>
+        <a:font script="Mymr" typeface="Myanmar Text"/>
+        <a:font script="Nkoo" typeface="Ebrima"/>
+        <a:font script="Olck" typeface="Nirmala UI"/>
+        <a:font script="Osma" typeface="Ebrima"/>
+        <a:font script="Phag" typeface="Phagspa"/>
+        <a:font script="Syrn" typeface="Estrangelo Edessa"/>
+        <a:font script="Syrj" typeface="Estrangelo Edessa"/>
+        <a:font script="Syre" typeface="Estrangelo Edessa"/>
+        <a:font script="Sora" typeface="Nirmala UI"/>
+        <a:font script="Tale" typeface="Microsoft Tai Le"/>
+        <a:font script="Talu" typeface="Microsoft New Tai Lue"/>
+        <a:font script="Tfng" typeface="Ebrima"/>
+      </a:majorFont>
+      <a:minorFont>
+        <a:latin typeface="Calibri" panose="020F0502020204030204"/>
+        <a:ea typeface=""/>
+        <a:cs typeface=""/>
+        <a:font script="Jpan" typeface="游ゴシック"/>
+        <a:font script="Hang" typeface="맑은 고딕"/>
+        <a:font script="Hans" typeface="等线"/>
+        <a:font script="Hant" typeface="新細明體"/>
+        <a:font script="Arab" typeface="Arial"/>
+        <a:font script="Hebr" typeface="Arial"/>
+        <a:font script="Thai" typeface="Cordia New"/>
+        <a:font script="Ethi" typeface="Nyala"/>
+        <a:font script="Beng" typeface="Vrinda"/>
+        <a:font script="Gujr" typeface="Shruti"/>
+        <a:font script="Khmr" typeface="DaunPenh"/>
+        <a:font script="Knda" typeface="Tunga"/>
+        <a:font script="Guru" typeface="Raavi"/>
+        <a:font script="Cans" typeface="Euphemia"/>
+        <a:font script="Cher" typeface="Plantagenet Cherokee"/>
+        <a:font script="Yiii" typeface="Microsoft Yi Baiti"/>
+        <a:font script="Tibt" typeface="Microsoft Himalaya"/>
+        <a:font script="Thaa" typeface="MV Boli"/>
+        <a:font script="Deva" typeface="Mangal"/>
+        <a:font script="Telu" typeface="Gautami"/>
+        <a:font script="Taml" typeface="Latha"/>
+        <a:font script="Syrc" typeface="Estrangelo Edessa"/>
+        <a:font script="Orya" typeface="Kalinga"/>
+        <a:font script="Mlym" typeface="Kartika"/>
+        <a:font script="Laoo" typeface="DokChampa"/>
+        <a:font script="Sinh" typeface="Iskoola Pota"/>
+        <a:font script="Mong" typeface="Mongolian Baiti"/>
+        <a:font script="Viet" typeface="Arial"/>
+        <a:font script="Uigh" typeface="Microsoft Uighur"/>
+        <a:font script="Geor" typeface="Sylfaen"/>
+        <a:font script="Armn" typeface="Arial"/>
+        <a:font script="Bugi" typeface="Leelawadee UI"/>
+        <a:font script="Bopo" typeface="Microsoft JhengHei"/>
+        <a:font script="Java" typeface="Javanese Text"/>
+        <a:font script="Lisu" typeface="Segoe UI"/>
+        <a:font script="Mymr" typeface="Myanmar Text"/>
+        <a:font script="Nkoo" typeface="Ebrima"/>
+        <a:font script="Olck" typeface="Nirmala UI"/>
+        <a:font script="Osma" typeface="Ebrima"/>
+        <a:font script="Phag" typeface="Phagspa"/>
+        <a:font script="Syrn" typeface="Estrangelo Edessa"/>
+        <a:font script="Syrj" typeface="Estrangelo Edessa"/>
+        <a:font script="Syre" typeface="Estrangelo Edessa"/>
+        <a:font script="Sora" typeface="Nirmala UI"/>
+        <a:font script="Tale" typeface="Microsoft Tai Le"/>
+        <a:font script="Talu" typeface="Microsoft New Tai Lue"/>
+        <a:font script="Tfng" typeface="Ebrima"/>
+      </a:minorFont>
+    </a:fontScheme>
+    <a:fmtScheme name="Стандартная">
+      <a:fillStyleLst>
+        <a:solidFill>
+          <a:schemeClr val="phClr"/>
+        </a:solidFill>
+        <a:gradFill rotWithShape="1">
+          <a:gsLst>
+            <a:gs pos="0">
+              <a:schemeClr val="phClr">
+                <a:lumMod val="110000"/>
+                <a:satMod val="105000"/>
+                <a:tint val="67000"/>
+              </a:schemeClr>
+            </a:gs>
+            <a:gs pos="50000">
+              <a:schemeClr val="phClr">
+                <a:lumMod val="105000"/>
+                <a:satMod val="103000"/>
+                <a:tint val="73000"/>
+              </a:schemeClr>
+            </a:gs>
+            <a:gs pos="100000">
+              <a:schemeClr val="phClr">
+                <a:lumMod val="105000"/>
+                <a:satMod val="109000"/>
+                <a:tint val="81000"/>
+              </a:schemeClr>
+            </a:gs>
+          </a:gsLst>
+          <a:lin ang="5400000" scaled="0"/>
+        </a:gradFill>
+        <a:gradFill rotWithShape="1">
+          <a:gsLst>
+            <a:gs pos="0">
+              <a:schemeClr val="phClr">
+                <a:satMod val="103000"/>
+                <a:lumMod val="102000"/>
+                <a:tint val="94000"/>
+              </a:schemeClr>
+            </a:gs>
+            <a:gs pos="50000">
+              <a:schemeClr val="phClr">
+                <a:satMod val="110000"/>
+                <a:lumMod val="100000"/>
+                <a:shade val="100000"/>
+              </a:schemeClr>
+            </a:gs>
+            <a:gs pos="100000">
+              <a:schemeClr val="phClr">
+                <a:lumMod val="99000"/>
+                <a:satMod val="120000"/>
+                <a:shade val="78000"/>
+              </a:schemeClr>
+            </a:gs>
+          </a:gsLst>
+          <a:lin ang="5400000" scaled="0"/>
+        </a:gradFill>
+      </a:fillStyleLst>
+      <a:lnStyleLst>
+        <a:ln w="6350" cap="flat" cmpd="sng" algn="ctr">
+          <a:solidFill>
+            <a:schemeClr val="phClr"/>
+          </a:solidFill>
+          <a:prstDash val="solid"/>
+          <a:miter lim="800000"/>
+        </a:ln>
+        <a:ln w="12700" cap="flat" cmpd="sng" algn="ctr">
+          <a:solidFill>
+            <a:schemeClr val="phClr"/>
+          </a:solidFill>
+          <a:prstDash val="solid"/>
+          <a:miter lim="800000"/>
+        </a:ln>
+        <a:ln w="19050" cap="flat" cmpd="sng" algn="ctr">
+          <a:solidFill>
+            <a:schemeClr val="phClr"/>
+          </a:solidFill>
+          <a:prstDash val="solid"/>
+          <a:miter lim="800000"/>
+        </a:ln>
+      </a:lnStyleLst>
+      <a:effectStyleLst>
+        <a:effectStyle>
+          <a:effectLst/>
+        </a:effectStyle>
+        <a:effectStyle>
+          <a:effectLst/>
+        </a:effectStyle>
+        <a:effectStyle>
+          <a:effectLst>
+            <a:outerShdw blurRad="57150" dist="19050" dir="5400000" algn="ctr" rotWithShape="0">
+              <a:srgbClr val="000000">
+                <a:alpha val="63000"/>
+              </a:srgbClr>
+            </a:outerShdw>
+          </a:effectLst>
+        </a:effectStyle>
+      </a:effectStyleLst>
+      <a:bgFillStyleLst>
+        <a:solidFill>
+          <a:schemeClr val="phClr"/>
+        </a:solidFill>
+        <a:solidFill>
+          <a:schemeClr val="phClr">
+            <a:tint val="95000"/>
+            <a:satMod val="170000"/>
+          </a:schemeClr>
+        </a:solidFill>
+        <a:gradFill rotWithShape="1">
+          <a:gsLst>
+            <a:gs pos="0">
+              <a:schemeClr val="phClr">
+                <a:tint val="93000"/>
+                <a:satMod val="150000"/>
+                <a:shade val="98000"/>
+                <a:lumMod val="102000"/>
+              </a:schemeClr>
+            </a:gs>
+            <a:gs pos="50000">
+              <a:schemeClr val="phClr">
+                <a:tint val="98000"/>
+                <a:satMod val="130000"/>
+                <a:shade val="90000"/>
+                <a:lumMod val="103000"/>
+              </a:schemeClr>
+            </a:gs>
+            <a:gs pos="100000">
+              <a:schemeClr val="phClr">
+                <a:shade val="63000"/>
+                <a:satMod val="120000"/>
+              </a:schemeClr>
+            </a:gs>
+          </a:gsLst>
+          <a:lin ang="5400000" scaled="0"/>
+        </a:gradFill>
+      </a:bgFillStyleLst>
+    </a:fmtScheme>
+  </a:themeElements>
+  <a:objectDefaults/>
+  <a:extraClrSchemeLst/>
+  <a:extLst>
+    <a:ext uri="{05A4C25C-085E-4340-85A3-A5531E510DB2}">
+      <thm15:themeFamily xmlns:thm15="http://schemas.microsoft.com/office/thememl/2012/main" name="Office Theme" id="{62F939B6-93AF-4DB8-9C6B-D6C7DFDC589F}" vid="{4A3C46E8-61CC-4603-A589-7422A47A8E4A}"/>
+    </a:ext>
+  </a:extLst>
+</a:theme>
 </file>
--- a/CorpApp_Presentation.pptx
+++ b/CorpApp_Presentation.pptx
@@ -1232,7 +1232,7 @@
               <a:buNone/>
             </a:pPr>
             <a:r>
-              <a:rPr lang="en-US" sz="2200" dirty="0">
+              <a:rPr lang="ru-RU" sz="2200" dirty="0">
                 <a:solidFill>
                   <a:srgbClr val="E0F2F1"/>
                 </a:solidFill>
@@ -1240,16 +1240,15 @@
                 <a:ea typeface="Arial" pitchFamily="34" charset="-122"/>
                 <a:cs typeface="Arial" pitchFamily="34" charset="-120"/>
               </a:rPr>
-              <a:t>Демонстрационное приложение</a:t>
-            </a:r>
-            <a:endParaRPr lang="en-US" sz="2200" dirty="0"/>
+              <a:t>Мобильный клиент корпоративного</a:t>
+            </a:r>
           </a:p>
           <a:p>
             <a:pPr marL="0" indent="0" algn="l">
               <a:buNone/>
             </a:pPr>
             <a:r>
-              <a:rPr lang="en-US" sz="2200" dirty="0">
+              <a:rPr lang="ru-RU" sz="2200" dirty="0">
                 <a:solidFill>
                   <a:srgbClr val="E0F2F1"/>
                 </a:solidFill>
@@ -1257,9 +1256,82 @@
                 <a:ea typeface="Arial" pitchFamily="34" charset="-122"/>
                 <a:cs typeface="Arial" pitchFamily="34" charset="-120"/>
               </a:rPr>
-              <a:t>корпоративного портала</a:t>
-            </a:r>
-            <a:endParaRPr lang="en-US" sz="2200" dirty="0"/>
+              <a:t>портала компании</a:t>
+            </a:r>
+          </a:p>
+          <a:p>
+            <a:pPr marL="0" indent="0" algn="l">
+              <a:buNone/>
+            </a:pPr>
+            <a:endParaRPr lang="ru-RU" sz="1100" dirty="0">
+              <a:solidFill>
+                <a:srgbClr val="E0F2F1"/>
+              </a:solidFill>
+              <a:latin typeface="Arial" pitchFamily="34" charset="0"/>
+              <a:ea typeface="Arial" pitchFamily="34" charset="-122"/>
+              <a:cs typeface="Arial" pitchFamily="34" charset="-120"/>
+            </a:endParaRPr>
+          </a:p>
+          <a:p>
+            <a:pPr marL="0" indent="0" algn="l">
+              <a:buNone/>
+            </a:pPr>
+            <a:r>
+              <a:rPr lang="ru-RU" sz="1400" dirty="0">
+                <a:solidFill>
+                  <a:srgbClr val="E0F2F1"/>
+                </a:solidFill>
+                <a:latin typeface="Arial" pitchFamily="34" charset="0"/>
+                <a:ea typeface="Arial" pitchFamily="34" charset="-122"/>
+                <a:cs typeface="Arial" pitchFamily="34" charset="-120"/>
+              </a:rPr>
+              <a:t>(д</a:t>
+            </a:r>
+            <a:r>
+              <a:rPr lang="en-US" sz="1400" dirty="0" err="1">
+                <a:solidFill>
+                  <a:srgbClr val="E0F2F1"/>
+                </a:solidFill>
+                <a:latin typeface="Arial" pitchFamily="34" charset="0"/>
+                <a:ea typeface="Arial" pitchFamily="34" charset="-122"/>
+                <a:cs typeface="Arial" pitchFamily="34" charset="-120"/>
+              </a:rPr>
+              <a:t>емонстрационное</a:t>
+            </a:r>
+            <a:r>
+              <a:rPr lang="en-US" sz="1400" dirty="0">
+                <a:solidFill>
+                  <a:srgbClr val="E0F2F1"/>
+                </a:solidFill>
+                <a:latin typeface="Arial" pitchFamily="34" charset="0"/>
+                <a:ea typeface="Arial" pitchFamily="34" charset="-122"/>
+                <a:cs typeface="Arial" pitchFamily="34" charset="-120"/>
+              </a:rPr>
+              <a:t> </a:t>
+            </a:r>
+            <a:r>
+              <a:rPr lang="en-US" sz="1400" dirty="0" err="1">
+                <a:solidFill>
+                  <a:srgbClr val="E0F2F1"/>
+                </a:solidFill>
+                <a:latin typeface="Arial" pitchFamily="34" charset="0"/>
+                <a:ea typeface="Arial" pitchFamily="34" charset="-122"/>
+                <a:cs typeface="Arial" pitchFamily="34" charset="-120"/>
+              </a:rPr>
+              <a:t>приложение</a:t>
+            </a:r>
+            <a:r>
+              <a:rPr lang="ru-RU" sz="1400" dirty="0">
+                <a:solidFill>
+                  <a:srgbClr val="E0F2F1"/>
+                </a:solidFill>
+                <a:latin typeface="Arial" pitchFamily="34" charset="0"/>
+                <a:ea typeface="Arial" pitchFamily="34" charset="-122"/>
+                <a:cs typeface="Arial" pitchFamily="34" charset="-120"/>
+              </a:rPr>
+              <a:t>)</a:t>
+            </a:r>
+            <a:endParaRPr lang="en-US" sz="1400" dirty="0"/>
           </a:p>
         </p:txBody>
       </p:sp>
